--- a/Тема 2/ДВ_3_ИИ_Практика_2-2.pptx
+++ b/Тема 2/ДВ_3_ИИ_Практика_2-2.pptx
@@ -5,7 +5,7 @@
     <p:sldMasterId id="2147483648" r:id="rId1"/>
   </p:sldMasterIdLst>
   <p:notesMasterIdLst>
-    <p:notesMasterId r:id="rId22"/>
+    <p:notesMasterId r:id="rId26"/>
   </p:notesMasterIdLst>
   <p:sldIdLst>
     <p:sldId id="256" r:id="rId2"/>
@@ -26,8 +26,12 @@
     <p:sldId id="315" r:id="rId17"/>
     <p:sldId id="316" r:id="rId18"/>
     <p:sldId id="305" r:id="rId19"/>
-    <p:sldId id="317" r:id="rId20"/>
-    <p:sldId id="266" r:id="rId21"/>
+    <p:sldId id="319" r:id="rId20"/>
+    <p:sldId id="320" r:id="rId21"/>
+    <p:sldId id="321" r:id="rId22"/>
+    <p:sldId id="322" r:id="rId23"/>
+    <p:sldId id="317" r:id="rId24"/>
+    <p:sldId id="266" r:id="rId25"/>
   </p:sldIdLst>
   <p:sldSz cx="12192000" cy="6858000"/>
   <p:notesSz cx="6858000" cy="9144000"/>
@@ -1477,7 +1481,7 @@
     </p:spTree>
     <p:extLst>
       <p:ext uri="{BB962C8B-B14F-4D97-AF65-F5344CB8AC3E}">
-        <p14:creationId xmlns:p14="http://schemas.microsoft.com/office/powerpoint/2010/main" val="2116156929"/>
+        <p14:creationId xmlns:p14="http://schemas.microsoft.com/office/powerpoint/2010/main" val="3741812126"/>
       </p:ext>
     </p:extLst>
   </p:cSld>
@@ -1623,7 +1627,14 @@
           <a:bodyPr/>
           <a:lstStyle/>
           <a:p>
-            <a:endParaRPr lang="ru-RU" dirty="0"/>
+            <a:endParaRPr lang="ru-RU" sz="1200" b="0" i="0" kern="1200" dirty="0">
+              <a:solidFill>
+                <a:schemeClr val="tx1"/>
+              </a:solidFill>
+              <a:latin typeface="+mn-lt"/>
+              <a:ea typeface="+mn-ea"/>
+              <a:cs typeface="+mn-cs"/>
+            </a:endParaRPr>
           </a:p>
         </p:txBody>
       </p:sp>
@@ -1644,7 +1655,368 @@
           <a:p>
             <a:fld id="{67A570D4-9143-4E91-8959-8D963457B763}" type="slidenum">
               <a:rPr lang="ru-RU" smtClean="0"/>
+              <a:pPr/>
               <a:t>20</a:t>
+            </a:fld>
+            <a:endParaRPr lang="ru-RU"/>
+          </a:p>
+        </p:txBody>
+      </p:sp>
+    </p:spTree>
+    <p:extLst>
+      <p:ext uri="{BB962C8B-B14F-4D97-AF65-F5344CB8AC3E}">
+        <p14:creationId xmlns:p14="http://schemas.microsoft.com/office/powerpoint/2010/main" val="4270567077"/>
+      </p:ext>
+    </p:extLst>
+  </p:cSld>
+  <p:clrMapOvr>
+    <a:masterClrMapping/>
+  </p:clrMapOvr>
+</p:notes>
+</file>
+
+<file path=ppt/notesSlides/notesSlide21.xml><?xml version="1.0" encoding="utf-8"?>
+<p:notes xmlns:a="http://schemas.openxmlformats.org/drawingml/2006/main" xmlns:r="http://schemas.openxmlformats.org/officeDocument/2006/relationships" xmlns:p="http://schemas.openxmlformats.org/presentationml/2006/main">
+  <p:cSld>
+    <p:spTree>
+      <p:nvGrpSpPr>
+        <p:cNvPr id="1" name=""/>
+        <p:cNvGrpSpPr/>
+        <p:nvPr/>
+      </p:nvGrpSpPr>
+      <p:grpSpPr>
+        <a:xfrm>
+          <a:off x="0" y="0"/>
+          <a:ext cx="0" cy="0"/>
+          <a:chOff x="0" y="0"/>
+          <a:chExt cx="0" cy="0"/>
+        </a:xfrm>
+      </p:grpSpPr>
+      <p:sp>
+        <p:nvSpPr>
+          <p:cNvPr id="2" name="Образ слайда 1"/>
+          <p:cNvSpPr>
+            <a:spLocks noGrp="1" noRot="1" noChangeAspect="1"/>
+          </p:cNvSpPr>
+          <p:nvPr>
+            <p:ph type="sldImg"/>
+          </p:nvPr>
+        </p:nvSpPr>
+        <p:spPr/>
+      </p:sp>
+      <p:sp>
+        <p:nvSpPr>
+          <p:cNvPr id="3" name="Заметки 2"/>
+          <p:cNvSpPr>
+            <a:spLocks noGrp="1"/>
+          </p:cNvSpPr>
+          <p:nvPr>
+            <p:ph type="body" idx="1"/>
+          </p:nvPr>
+        </p:nvSpPr>
+        <p:spPr/>
+        <p:txBody>
+          <a:bodyPr/>
+          <a:lstStyle/>
+          <a:p>
+            <a:endParaRPr lang="ru-RU" sz="1200" b="0" i="0" kern="1200" dirty="0">
+              <a:solidFill>
+                <a:schemeClr val="tx1"/>
+              </a:solidFill>
+              <a:latin typeface="+mn-lt"/>
+              <a:ea typeface="+mn-ea"/>
+              <a:cs typeface="+mn-cs"/>
+            </a:endParaRPr>
+          </a:p>
+        </p:txBody>
+      </p:sp>
+      <p:sp>
+        <p:nvSpPr>
+          <p:cNvPr id="4" name="Номер слайда 3"/>
+          <p:cNvSpPr>
+            <a:spLocks noGrp="1"/>
+          </p:cNvSpPr>
+          <p:nvPr>
+            <p:ph type="sldNum" sz="quarter" idx="10"/>
+          </p:nvPr>
+        </p:nvSpPr>
+        <p:spPr/>
+        <p:txBody>
+          <a:bodyPr/>
+          <a:lstStyle/>
+          <a:p>
+            <a:fld id="{67A570D4-9143-4E91-8959-8D963457B763}" type="slidenum">
+              <a:rPr lang="ru-RU" smtClean="0"/>
+              <a:pPr/>
+              <a:t>21</a:t>
+            </a:fld>
+            <a:endParaRPr lang="ru-RU"/>
+          </a:p>
+        </p:txBody>
+      </p:sp>
+    </p:spTree>
+    <p:extLst>
+      <p:ext uri="{BB962C8B-B14F-4D97-AF65-F5344CB8AC3E}">
+        <p14:creationId xmlns:p14="http://schemas.microsoft.com/office/powerpoint/2010/main" val="557661035"/>
+      </p:ext>
+    </p:extLst>
+  </p:cSld>
+  <p:clrMapOvr>
+    <a:masterClrMapping/>
+  </p:clrMapOvr>
+</p:notes>
+</file>
+
+<file path=ppt/notesSlides/notesSlide22.xml><?xml version="1.0" encoding="utf-8"?>
+<p:notes xmlns:a="http://schemas.openxmlformats.org/drawingml/2006/main" xmlns:r="http://schemas.openxmlformats.org/officeDocument/2006/relationships" xmlns:p="http://schemas.openxmlformats.org/presentationml/2006/main">
+  <p:cSld>
+    <p:spTree>
+      <p:nvGrpSpPr>
+        <p:cNvPr id="1" name=""/>
+        <p:cNvGrpSpPr/>
+        <p:nvPr/>
+      </p:nvGrpSpPr>
+      <p:grpSpPr>
+        <a:xfrm>
+          <a:off x="0" y="0"/>
+          <a:ext cx="0" cy="0"/>
+          <a:chOff x="0" y="0"/>
+          <a:chExt cx="0" cy="0"/>
+        </a:xfrm>
+      </p:grpSpPr>
+      <p:sp>
+        <p:nvSpPr>
+          <p:cNvPr id="2" name="Образ слайда 1"/>
+          <p:cNvSpPr>
+            <a:spLocks noGrp="1" noRot="1" noChangeAspect="1"/>
+          </p:cNvSpPr>
+          <p:nvPr>
+            <p:ph type="sldImg"/>
+          </p:nvPr>
+        </p:nvSpPr>
+        <p:spPr/>
+      </p:sp>
+      <p:sp>
+        <p:nvSpPr>
+          <p:cNvPr id="3" name="Заметки 2"/>
+          <p:cNvSpPr>
+            <a:spLocks noGrp="1"/>
+          </p:cNvSpPr>
+          <p:nvPr>
+            <p:ph type="body" idx="1"/>
+          </p:nvPr>
+        </p:nvSpPr>
+        <p:spPr/>
+        <p:txBody>
+          <a:bodyPr/>
+          <a:lstStyle/>
+          <a:p>
+            <a:endParaRPr lang="ru-RU" sz="1200" b="0" i="0" kern="1200" dirty="0">
+              <a:solidFill>
+                <a:schemeClr val="tx1"/>
+              </a:solidFill>
+              <a:latin typeface="+mn-lt"/>
+              <a:ea typeface="+mn-ea"/>
+              <a:cs typeface="+mn-cs"/>
+            </a:endParaRPr>
+          </a:p>
+        </p:txBody>
+      </p:sp>
+      <p:sp>
+        <p:nvSpPr>
+          <p:cNvPr id="4" name="Номер слайда 3"/>
+          <p:cNvSpPr>
+            <a:spLocks noGrp="1"/>
+          </p:cNvSpPr>
+          <p:nvPr>
+            <p:ph type="sldNum" sz="quarter" idx="10"/>
+          </p:nvPr>
+        </p:nvSpPr>
+        <p:spPr/>
+        <p:txBody>
+          <a:bodyPr/>
+          <a:lstStyle/>
+          <a:p>
+            <a:fld id="{67A570D4-9143-4E91-8959-8D963457B763}" type="slidenum">
+              <a:rPr lang="ru-RU" smtClean="0"/>
+              <a:pPr/>
+              <a:t>22</a:t>
+            </a:fld>
+            <a:endParaRPr lang="ru-RU"/>
+          </a:p>
+        </p:txBody>
+      </p:sp>
+    </p:spTree>
+    <p:extLst>
+      <p:ext uri="{BB962C8B-B14F-4D97-AF65-F5344CB8AC3E}">
+        <p14:creationId xmlns:p14="http://schemas.microsoft.com/office/powerpoint/2010/main" val="2117683573"/>
+      </p:ext>
+    </p:extLst>
+  </p:cSld>
+  <p:clrMapOvr>
+    <a:masterClrMapping/>
+  </p:clrMapOvr>
+</p:notes>
+</file>
+
+<file path=ppt/notesSlides/notesSlide23.xml><?xml version="1.0" encoding="utf-8"?>
+<p:notes xmlns:a="http://schemas.openxmlformats.org/drawingml/2006/main" xmlns:r="http://schemas.openxmlformats.org/officeDocument/2006/relationships" xmlns:p="http://schemas.openxmlformats.org/presentationml/2006/main">
+  <p:cSld>
+    <p:spTree>
+      <p:nvGrpSpPr>
+        <p:cNvPr id="1" name=""/>
+        <p:cNvGrpSpPr/>
+        <p:nvPr/>
+      </p:nvGrpSpPr>
+      <p:grpSpPr>
+        <a:xfrm>
+          <a:off x="0" y="0"/>
+          <a:ext cx="0" cy="0"/>
+          <a:chOff x="0" y="0"/>
+          <a:chExt cx="0" cy="0"/>
+        </a:xfrm>
+      </p:grpSpPr>
+      <p:sp>
+        <p:nvSpPr>
+          <p:cNvPr id="2" name="Образ слайда 1"/>
+          <p:cNvSpPr>
+            <a:spLocks noGrp="1" noRot="1" noChangeAspect="1"/>
+          </p:cNvSpPr>
+          <p:nvPr>
+            <p:ph type="sldImg"/>
+          </p:nvPr>
+        </p:nvSpPr>
+        <p:spPr/>
+      </p:sp>
+      <p:sp>
+        <p:nvSpPr>
+          <p:cNvPr id="3" name="Заметки 2"/>
+          <p:cNvSpPr>
+            <a:spLocks noGrp="1"/>
+          </p:cNvSpPr>
+          <p:nvPr>
+            <p:ph type="body" idx="1"/>
+          </p:nvPr>
+        </p:nvSpPr>
+        <p:spPr/>
+        <p:txBody>
+          <a:bodyPr/>
+          <a:lstStyle/>
+          <a:p>
+            <a:endParaRPr lang="ru-RU" sz="1200" b="0" i="0" kern="1200" dirty="0">
+              <a:solidFill>
+                <a:schemeClr val="tx1"/>
+              </a:solidFill>
+              <a:latin typeface="+mn-lt"/>
+              <a:ea typeface="+mn-ea"/>
+              <a:cs typeface="+mn-cs"/>
+            </a:endParaRPr>
+          </a:p>
+        </p:txBody>
+      </p:sp>
+      <p:sp>
+        <p:nvSpPr>
+          <p:cNvPr id="4" name="Номер слайда 3"/>
+          <p:cNvSpPr>
+            <a:spLocks noGrp="1"/>
+          </p:cNvSpPr>
+          <p:nvPr>
+            <p:ph type="sldNum" sz="quarter" idx="10"/>
+          </p:nvPr>
+        </p:nvSpPr>
+        <p:spPr/>
+        <p:txBody>
+          <a:bodyPr/>
+          <a:lstStyle/>
+          <a:p>
+            <a:fld id="{67A570D4-9143-4E91-8959-8D963457B763}" type="slidenum">
+              <a:rPr lang="ru-RU" smtClean="0"/>
+              <a:pPr/>
+              <a:t>23</a:t>
+            </a:fld>
+            <a:endParaRPr lang="ru-RU"/>
+          </a:p>
+        </p:txBody>
+      </p:sp>
+    </p:spTree>
+    <p:extLst>
+      <p:ext uri="{BB962C8B-B14F-4D97-AF65-F5344CB8AC3E}">
+        <p14:creationId xmlns:p14="http://schemas.microsoft.com/office/powerpoint/2010/main" val="2116156929"/>
+      </p:ext>
+    </p:extLst>
+  </p:cSld>
+  <p:clrMapOvr>
+    <a:masterClrMapping/>
+  </p:clrMapOvr>
+</p:notes>
+</file>
+
+<file path=ppt/notesSlides/notesSlide24.xml><?xml version="1.0" encoding="utf-8"?>
+<p:notes xmlns:a="http://schemas.openxmlformats.org/drawingml/2006/main" xmlns:r="http://schemas.openxmlformats.org/officeDocument/2006/relationships" xmlns:p="http://schemas.openxmlformats.org/presentationml/2006/main">
+  <p:cSld>
+    <p:spTree>
+      <p:nvGrpSpPr>
+        <p:cNvPr id="1" name=""/>
+        <p:cNvGrpSpPr/>
+        <p:nvPr/>
+      </p:nvGrpSpPr>
+      <p:grpSpPr>
+        <a:xfrm>
+          <a:off x="0" y="0"/>
+          <a:ext cx="0" cy="0"/>
+          <a:chOff x="0" y="0"/>
+          <a:chExt cx="0" cy="0"/>
+        </a:xfrm>
+      </p:grpSpPr>
+      <p:sp>
+        <p:nvSpPr>
+          <p:cNvPr id="2" name="Образ слайда 1"/>
+          <p:cNvSpPr>
+            <a:spLocks noGrp="1" noRot="1" noChangeAspect="1"/>
+          </p:cNvSpPr>
+          <p:nvPr>
+            <p:ph type="sldImg"/>
+          </p:nvPr>
+        </p:nvSpPr>
+        <p:spPr/>
+      </p:sp>
+      <p:sp>
+        <p:nvSpPr>
+          <p:cNvPr id="3" name="Заметки 2"/>
+          <p:cNvSpPr>
+            <a:spLocks noGrp="1"/>
+          </p:cNvSpPr>
+          <p:nvPr>
+            <p:ph type="body" idx="1"/>
+          </p:nvPr>
+        </p:nvSpPr>
+        <p:spPr/>
+        <p:txBody>
+          <a:bodyPr/>
+          <a:lstStyle/>
+          <a:p>
+            <a:endParaRPr lang="ru-RU" dirty="0"/>
+          </a:p>
+        </p:txBody>
+      </p:sp>
+      <p:sp>
+        <p:nvSpPr>
+          <p:cNvPr id="4" name="Номер слайда 3"/>
+          <p:cNvSpPr>
+            <a:spLocks noGrp="1"/>
+          </p:cNvSpPr>
+          <p:nvPr>
+            <p:ph type="sldNum" sz="quarter" idx="10"/>
+          </p:nvPr>
+        </p:nvSpPr>
+        <p:spPr/>
+        <p:txBody>
+          <a:bodyPr/>
+          <a:lstStyle/>
+          <a:p>
+            <a:fld id="{67A570D4-9143-4E91-8959-8D963457B763}" type="slidenum">
+              <a:rPr lang="ru-RU" smtClean="0"/>
+              <a:t>24</a:t>
             </a:fld>
             <a:endParaRPr lang="ru-RU"/>
           </a:p>
@@ -13472,31 +13844,7 @@
                   <a:cs typeface="PT Sans"/>
                   <a:sym typeface="PT Sans"/>
                 </a:rPr>
-                <a:t>Когда и как использовать Grid / </a:t>
-              </a:r>
-              <a:r>
-                <a:rPr lang="ru-RU" sz="2000" dirty="0" err="1">
-                  <a:solidFill>
-                    <a:schemeClr val="lt1"/>
-                  </a:solidFill>
-                  <a:latin typeface="PT Sans" panose="020B0503020203020204" pitchFamily="34" charset="0"/>
-                  <a:ea typeface="PT Sans"/>
-                  <a:cs typeface="PT Sans"/>
-                  <a:sym typeface="PT Sans"/>
-                </a:rPr>
-                <a:t>Random</a:t>
-              </a:r>
-              <a:r>
-                <a:rPr lang="ru-RU" sz="2000" dirty="0">
-                  <a:solidFill>
-                    <a:schemeClr val="lt1"/>
-                  </a:solidFill>
-                  <a:latin typeface="PT Sans" panose="020B0503020203020204" pitchFamily="34" charset="0"/>
-                  <a:ea typeface="PT Sans"/>
-                  <a:cs typeface="PT Sans"/>
-                  <a:sym typeface="PT Sans"/>
-                </a:rPr>
-                <a:t> Search в ML</a:t>
+                <a:t>SVM с RBF‑ядром: идея</a:t>
               </a:r>
             </a:p>
           </p:txBody>
@@ -13804,7 +14152,7 @@
         </p:spPr>
         <p:txBody>
           <a:bodyPr>
-            <a:normAutofit fontScale="85000" lnSpcReduction="20000"/>
+            <a:normAutofit/>
           </a:bodyPr>
           <a:lstStyle/>
           <a:p>
@@ -13813,43 +14161,22 @@
               <a:buChar char="•"/>
             </a:pPr>
             <a:r>
-              <a:rPr lang="ru-RU" i="0" dirty="0">
+              <a:rPr lang="ru-RU" b="0" i="0" dirty="0">
                 <a:effectLst/>
               </a:rPr>
-              <a:t>Зачем нужен перебор </a:t>
-            </a:r>
-            <a:r>
-              <a:rPr lang="ru-RU" i="0" dirty="0" err="1">
+              <a:t>Support </a:t>
+            </a:r>
+            <a:r>
+              <a:rPr lang="ru-RU" b="0" i="0" dirty="0" err="1">
                 <a:effectLst/>
               </a:rPr>
-              <a:t>гиперпараметров</a:t>
-            </a:r>
-            <a:endParaRPr lang="ru-RU" i="0" dirty="0">
-              <a:effectLst/>
-            </a:endParaRPr>
-          </a:p>
-          <a:p>
-            <a:pPr marL="742950" lvl="1" indent="-285750" algn="l">
-              <a:buFont typeface="Arial" panose="020B0604020202020204" pitchFamily="34" charset="0"/>
-              <a:buChar char="•"/>
-            </a:pPr>
-            <a:r>
-              <a:rPr lang="ru-RU" i="0" dirty="0">
+              <a:t>Vector</a:t>
+            </a:r>
+            <a:r>
+              <a:rPr lang="ru-RU" b="0" i="0" dirty="0">
                 <a:effectLst/>
               </a:rPr>
-              <a:t>Улучшение качества модели без изменения структуры алгоритма.</a:t>
-            </a:r>
-          </a:p>
-          <a:p>
-            <a:pPr marL="742950" lvl="1" indent="-285750" algn="l">
-              <a:buFont typeface="Arial" panose="020B0604020202020204" pitchFamily="34" charset="0"/>
-              <a:buChar char="•"/>
-            </a:pPr>
-            <a:r>
-              <a:rPr lang="ru-RU" i="0" dirty="0">
-                <a:effectLst/>
-              </a:rPr>
-              <a:t>Поиск баланса «качество ↔ сложность модели ↔ время обучения».</a:t>
+              <a:t> Machine (SVM) ищет границу максимального зазора между классами.</a:t>
             </a:r>
           </a:p>
           <a:p>
@@ -13858,82 +14185,22 @@
               <a:buChar char="•"/>
             </a:pPr>
             <a:r>
-              <a:rPr lang="ru-RU" i="0" dirty="0">
+              <a:rPr lang="ru-RU" b="0" i="0" dirty="0">
                 <a:effectLst/>
               </a:rPr>
-              <a:t>Когда подходит Grid Search</a:t>
-            </a:r>
-          </a:p>
-          <a:p>
-            <a:pPr marL="742950" lvl="1" indent="-285750" algn="l">
-              <a:buFont typeface="Arial" panose="020B0604020202020204" pitchFamily="34" charset="0"/>
-              <a:buChar char="•"/>
-            </a:pPr>
-            <a:r>
-              <a:rPr lang="ru-RU" i="0" dirty="0">
+              <a:t>Для нелинейно разделимых данных используется ядро (</a:t>
+            </a:r>
+            <a:r>
+              <a:rPr lang="ru-RU" b="0" i="0" dirty="0" err="1">
                 <a:effectLst/>
               </a:rPr>
-              <a:t>Небольшое число </a:t>
-            </a:r>
-            <a:r>
-              <a:rPr lang="ru-RU" i="0" dirty="0" err="1">
+              <a:t>kernel</a:t>
+            </a:r>
+            <a:r>
+              <a:rPr lang="ru-RU" b="0" i="0" dirty="0">
                 <a:effectLst/>
               </a:rPr>
-              <a:t>гиперпараметров</a:t>
-            </a:r>
-            <a:r>
-              <a:rPr lang="ru-RU" i="0" dirty="0">
-                <a:effectLst/>
-              </a:rPr>
-              <a:t> и значений (например, </a:t>
-            </a:r>
-            <a:r>
-              <a:rPr lang="ru-RU" i="0" dirty="0" err="1">
-                <a:effectLst/>
-              </a:rPr>
-              <a:t>mtry</a:t>
-            </a:r>
-            <a:r>
-              <a:rPr lang="ru-RU" i="0" dirty="0">
-                <a:effectLst/>
-              </a:rPr>
-              <a:t> ∈ {2,4,6}).</a:t>
-            </a:r>
-          </a:p>
-          <a:p>
-            <a:pPr marL="742950" lvl="1" indent="-285750" algn="l">
-              <a:buFont typeface="Arial" panose="020B0604020202020204" pitchFamily="34" charset="0"/>
-              <a:buChar char="•"/>
-            </a:pPr>
-            <a:r>
-              <a:rPr lang="ru-RU" i="0" dirty="0">
-                <a:effectLst/>
-              </a:rPr>
-              <a:t>Нужно тщательно исследовать </a:t>
-            </a:r>
-            <a:r>
-              <a:rPr lang="ru-RU" i="1" dirty="0">
-                <a:effectLst/>
-              </a:rPr>
-              <a:t>узкий</a:t>
-            </a:r>
-            <a:r>
-              <a:rPr lang="ru-RU" i="0" dirty="0">
-                <a:effectLst/>
-              </a:rPr>
-              <a:t> диапазон параметров вокруг «разумных» значений.</a:t>
-            </a:r>
-          </a:p>
-          <a:p>
-            <a:pPr marL="742950" lvl="1" indent="-285750" algn="l">
-              <a:buFont typeface="Arial" panose="020B0604020202020204" pitchFamily="34" charset="0"/>
-              <a:buChar char="•"/>
-            </a:pPr>
-            <a:r>
-              <a:rPr lang="ru-RU" i="0" dirty="0">
-                <a:effectLst/>
-              </a:rPr>
-              <a:t>Подходит для учебных задач и моделей средней сложности.</a:t>
+              <a:t>), которое отображает признаки в более высокое измерение.</a:t>
             </a:r>
           </a:p>
           <a:p>
@@ -13942,94 +14209,46 @@
               <a:buChar char="•"/>
             </a:pPr>
             <a:r>
-              <a:rPr lang="ru-RU" i="0" dirty="0">
+              <a:rPr lang="ru-RU" b="0" i="0" dirty="0">
                 <a:effectLst/>
               </a:rPr>
-              <a:t>Когда лучше </a:t>
-            </a:r>
-            <a:r>
-              <a:rPr lang="ru-RU" i="0" dirty="0" err="1">
+              <a:t>RBF‑ядро (</a:t>
+            </a:r>
+            <a:r>
+              <a:rPr lang="ru-RU" b="0" i="0" dirty="0" err="1">
                 <a:effectLst/>
               </a:rPr>
-              <a:t>Random</a:t>
-            </a:r>
-            <a:r>
-              <a:rPr lang="ru-RU" i="0" dirty="0">
+              <a:t>Radial</a:t>
+            </a:r>
+            <a:r>
+              <a:rPr lang="ru-RU" b="0" i="0" dirty="0">
                 <a:effectLst/>
               </a:rPr>
-              <a:t> Search</a:t>
-            </a:r>
-          </a:p>
-          <a:p>
-            <a:pPr marL="742950" lvl="1" indent="-285750" algn="l">
-              <a:buFont typeface="Arial" panose="020B0604020202020204" pitchFamily="34" charset="0"/>
-              <a:buChar char="•"/>
-            </a:pPr>
-            <a:r>
-              <a:rPr lang="ru-RU" i="0" dirty="0">
+              <a:t> </a:t>
+            </a:r>
+            <a:r>
+              <a:rPr lang="ru-RU" b="0" i="0" dirty="0" err="1">
                 <a:effectLst/>
               </a:rPr>
-              <a:t>Много </a:t>
-            </a:r>
-            <a:r>
-              <a:rPr lang="ru-RU" i="0" dirty="0" err="1">
+              <a:t>Basis</a:t>
+            </a:r>
+            <a:r>
+              <a:rPr lang="ru-RU" b="0" i="0" dirty="0">
                 <a:effectLst/>
               </a:rPr>
-              <a:t>гиперпараметров</a:t>
-            </a:r>
-            <a:r>
-              <a:rPr lang="ru-RU" i="0" dirty="0">
+              <a:t> </a:t>
+            </a:r>
+            <a:r>
+              <a:rPr lang="ru-RU" b="0" i="0" dirty="0" err="1">
                 <a:effectLst/>
               </a:rPr>
-              <a:t> или широкий диапазон значений.</a:t>
-            </a:r>
-          </a:p>
-          <a:p>
-            <a:pPr marL="742950" lvl="1" indent="-285750" algn="l">
-              <a:buFont typeface="Arial" panose="020B0604020202020204" pitchFamily="34" charset="0"/>
-              <a:buChar char="•"/>
-            </a:pPr>
-            <a:r>
-              <a:rPr lang="ru-RU" i="0" dirty="0">
+              <a:t>Function</a:t>
+            </a:r>
+            <a:r>
+              <a:rPr lang="ru-RU" b="0" i="0" dirty="0">
                 <a:effectLst/>
               </a:rPr>
-              <a:t>Важна скорость: за то же время можно использовать больше комбинаций.</a:t>
-            </a:r>
-          </a:p>
-          <a:p>
-            <a:pPr marL="742950" lvl="1" indent="-285750" algn="l">
-              <a:buFont typeface="Arial" panose="020B0604020202020204" pitchFamily="34" charset="0"/>
-              <a:buChar char="•"/>
-            </a:pPr>
-            <a:r>
-              <a:rPr lang="ru-RU" i="0" dirty="0">
-                <a:effectLst/>
-              </a:rPr>
-              <a:t>Практически в больших проектах часто начинают с </a:t>
-            </a:r>
-            <a:r>
-              <a:rPr lang="ru-RU" i="0" dirty="0" err="1">
-                <a:effectLst/>
-              </a:rPr>
-              <a:t>Random</a:t>
-            </a:r>
-            <a:r>
-              <a:rPr lang="ru-RU" i="0" dirty="0">
-                <a:effectLst/>
-              </a:rPr>
-              <a:t> Search, а затем локально </a:t>
-            </a:r>
-            <a:r>
-              <a:rPr lang="ru-RU" i="0" dirty="0" err="1">
-                <a:effectLst/>
-              </a:rPr>
-              <a:t>донастраивают</a:t>
-            </a:r>
-            <a:r>
-              <a:rPr lang="ru-RU" i="0" dirty="0">
-                <a:effectLst/>
-              </a:rPr>
-              <a:t>.</a:t>
+              <a:t>) — одно из самых популярных: хорошо работает при сложных, изогнутых границах.</a:t>
             </a:r>
           </a:p>
           <a:p>
@@ -14038,126 +14257,33 @@
               <a:buChar char="•"/>
             </a:pPr>
             <a:r>
-              <a:rPr lang="ru-RU" i="0" dirty="0">
+              <a:rPr lang="ru-RU" b="0" i="0" dirty="0">
                 <a:effectLst/>
               </a:rPr>
-              <a:t>Общие рекомендации</a:t>
-            </a:r>
-          </a:p>
-          <a:p>
-            <a:pPr marL="742950" lvl="1" indent="-285750" algn="l">
-              <a:buFont typeface="Arial" panose="020B0604020202020204" pitchFamily="34" charset="0"/>
-              <a:buChar char="•"/>
-            </a:pPr>
-            <a:r>
-              <a:rPr lang="ru-RU" i="0" dirty="0">
+              <a:t>В задачах биомедицины SVM часто даёт хорошее качество «из коробки», но чувствителен к выбору </a:t>
+            </a:r>
+            <a:r>
+              <a:rPr lang="ru-RU" b="0" i="0" dirty="0" err="1">
                 <a:effectLst/>
               </a:rPr>
-              <a:t>Всегда отделяйте </a:t>
-            </a:r>
-            <a:r>
-              <a:rPr lang="ru-RU" i="0" dirty="0" err="1">
+              <a:t>гиперпараметров</a:t>
+            </a:r>
+            <a:r>
+              <a:rPr lang="ru-RU" b="0" i="0" dirty="0">
                 <a:effectLst/>
               </a:rPr>
-              <a:t>train</a:t>
-            </a:r>
-            <a:r>
-              <a:rPr lang="ru-RU" i="0" dirty="0">
-                <a:effectLst/>
-              </a:rPr>
-              <a:t>/</a:t>
-            </a:r>
-            <a:r>
-              <a:rPr lang="ru-RU" i="0" dirty="0" err="1">
-                <a:effectLst/>
-              </a:rPr>
-              <a:t>validation</a:t>
-            </a:r>
-            <a:r>
-              <a:rPr lang="ru-RU" i="0" dirty="0">
-                <a:effectLst/>
-              </a:rPr>
-              <a:t> (CV) от </a:t>
-            </a:r>
-            <a:r>
-              <a:rPr lang="ru-RU" i="0" dirty="0" err="1">
-                <a:effectLst/>
-              </a:rPr>
-              <a:t>final</a:t>
-            </a:r>
-            <a:r>
-              <a:rPr lang="ru-RU" i="0" dirty="0">
-                <a:effectLst/>
-              </a:rPr>
-              <a:t> </a:t>
-            </a:r>
-            <a:r>
-              <a:rPr lang="ru-RU" i="0" dirty="0" err="1">
-                <a:effectLst/>
-              </a:rPr>
-              <a:t>test</a:t>
-            </a:r>
-            <a:r>
-              <a:rPr lang="ru-RU" i="0" dirty="0">
-                <a:effectLst/>
-              </a:rPr>
-              <a:t>: тест не должен участвовать в подборе </a:t>
-            </a:r>
-            <a:r>
-              <a:rPr lang="ru-RU" i="0" dirty="0" err="1">
-                <a:effectLst/>
-              </a:rPr>
-              <a:t>гиперпараметров</a:t>
-            </a:r>
-            <a:r>
-              <a:rPr lang="ru-RU" i="0" dirty="0">
-                <a:effectLst/>
-              </a:rPr>
               <a:t>.</a:t>
             </a:r>
-          </a:p>
-          <a:p>
-            <a:pPr marL="742950" lvl="1" indent="-285750" algn="l">
-              <a:buFont typeface="Arial" panose="020B0604020202020204" pitchFamily="34" charset="0"/>
-              <a:buChar char="•"/>
-            </a:pPr>
-            <a:r>
-              <a:rPr lang="ru-RU" i="0" dirty="0">
-                <a:effectLst/>
-              </a:rPr>
-              <a:t>Выбирайте метрику, отражающую задачу (для дисбаланса — F1 или AUC‑PR, а не только </a:t>
-            </a:r>
-            <a:r>
-              <a:rPr lang="ru-RU" i="0" dirty="0" err="1">
-                <a:effectLst/>
-              </a:rPr>
-              <a:t>Accuracy</a:t>
-            </a:r>
-            <a:r>
-              <a:rPr lang="ru-RU" i="0" dirty="0">
-                <a:effectLst/>
-              </a:rPr>
-              <a:t>).</a:t>
-            </a:r>
-          </a:p>
-          <a:p>
-            <a:pPr marL="742950" lvl="1" indent="-285750" algn="l">
-              <a:buFont typeface="Arial" panose="020B0604020202020204" pitchFamily="34" charset="0"/>
-              <a:buChar char="•"/>
-            </a:pPr>
-            <a:r>
-              <a:rPr lang="ru-RU" i="0" dirty="0">
-                <a:effectLst/>
-              </a:rPr>
-              <a:t>Начинайте с грубой настройки (широкий диапазон, мало итераций), затем при необходимости делайте более «тонкий» поиск в окрестности лучших значений.</a:t>
-            </a:r>
+            <a:endParaRPr lang="en-US" b="0" i="0" dirty="0">
+              <a:effectLst/>
+            </a:endParaRPr>
           </a:p>
         </p:txBody>
       </p:sp>
     </p:spTree>
     <p:extLst>
       <p:ext uri="{BB962C8B-B14F-4D97-AF65-F5344CB8AC3E}">
-        <p14:creationId xmlns:p14="http://schemas.microsoft.com/office/powerpoint/2010/main" val="3082961005"/>
+        <p14:creationId xmlns:p14="http://schemas.microsoft.com/office/powerpoint/2010/main" val="2218844357"/>
       </p:ext>
     </p:extLst>
   </p:cSld>
@@ -14789,6 +14915,3024 @@
 </file>
 
 <file path=ppt/slides/slide20.xml><?xml version="1.0" encoding="utf-8"?>
+<p:sld xmlns:a="http://schemas.openxmlformats.org/drawingml/2006/main" xmlns:r="http://schemas.openxmlformats.org/officeDocument/2006/relationships" xmlns:p="http://schemas.openxmlformats.org/presentationml/2006/main">
+  <p:cSld>
+    <p:spTree>
+      <p:nvGrpSpPr>
+        <p:cNvPr id="1" name=""/>
+        <p:cNvGrpSpPr/>
+        <p:nvPr/>
+      </p:nvGrpSpPr>
+      <p:grpSpPr>
+        <a:xfrm>
+          <a:off x="0" y="0"/>
+          <a:ext cx="0" cy="0"/>
+          <a:chOff x="0" y="0"/>
+          <a:chExt cx="0" cy="0"/>
+        </a:xfrm>
+      </p:grpSpPr>
+      <p:sp>
+        <p:nvSpPr>
+          <p:cNvPr id="13" name="Номер слайда 12"/>
+          <p:cNvSpPr>
+            <a:spLocks noGrp="1"/>
+          </p:cNvSpPr>
+          <p:nvPr>
+            <p:ph type="sldNum" sz="quarter" idx="12"/>
+          </p:nvPr>
+        </p:nvSpPr>
+        <p:spPr>
+          <a:xfrm>
+            <a:off x="9274478" y="6356350"/>
+            <a:ext cx="2743200" cy="365125"/>
+          </a:xfrm>
+        </p:spPr>
+        <p:txBody>
+          <a:bodyPr/>
+          <a:lstStyle/>
+          <a:p>
+            <a:fld id="{B19B0651-EE4F-4900-A07F-96A6BFA9D0F0}" type="slidenum">
+              <a:rPr lang="ru-RU" smtClean="0">
+                <a:latin typeface="PT Sans" panose="020B0503020203020204" pitchFamily="34" charset="0"/>
+              </a:rPr>
+              <a:pPr/>
+              <a:t>20</a:t>
+            </a:fld>
+            <a:endParaRPr lang="ru-RU" dirty="0">
+              <a:latin typeface="PT Sans" panose="020B0503020203020204" pitchFamily="34" charset="0"/>
+            </a:endParaRPr>
+          </a:p>
+        </p:txBody>
+      </p:sp>
+      <p:grpSp>
+        <p:nvGrpSpPr>
+          <p:cNvPr id="9" name="Группа 8">
+            <a:extLst>
+              <a:ext uri="{FF2B5EF4-FFF2-40B4-BE49-F238E27FC236}">
+                <a16:creationId xmlns:a16="http://schemas.microsoft.com/office/drawing/2014/main" id="{D7342440-FCEE-2E4F-950F-6FE7857B3EB5}"/>
+              </a:ext>
+            </a:extLst>
+          </p:cNvPr>
+          <p:cNvGrpSpPr/>
+          <p:nvPr/>
+        </p:nvGrpSpPr>
+        <p:grpSpPr>
+          <a:xfrm>
+            <a:off x="0" y="-4966"/>
+            <a:ext cx="12192000" cy="1035565"/>
+            <a:chOff x="0" y="1924"/>
+            <a:chExt cx="9144000" cy="832664"/>
+          </a:xfrm>
+        </p:grpSpPr>
+        <p:sp>
+          <p:nvSpPr>
+            <p:cNvPr id="10" name="Google Shape;133;p5">
+              <a:extLst>
+                <a:ext uri="{FF2B5EF4-FFF2-40B4-BE49-F238E27FC236}">
+                  <a16:creationId xmlns:a16="http://schemas.microsoft.com/office/drawing/2014/main" id="{E1FF157E-1AAE-A345-AC22-C4FE991023F3}"/>
+                </a:ext>
+              </a:extLst>
+            </p:cNvPr>
+            <p:cNvSpPr/>
+            <p:nvPr/>
+          </p:nvSpPr>
+          <p:spPr>
+            <a:xfrm>
+              <a:off x="0" y="1924"/>
+              <a:ext cx="9144000" cy="832664"/>
+            </a:xfrm>
+            <a:prstGeom prst="rect">
+              <a:avLst/>
+            </a:prstGeom>
+            <a:gradFill>
+              <a:gsLst>
+                <a:gs pos="0">
+                  <a:srgbClr val="003061"/>
+                </a:gs>
+                <a:gs pos="50000">
+                  <a:srgbClr val="00468D"/>
+                </a:gs>
+                <a:gs pos="100000">
+                  <a:srgbClr val="0054AA"/>
+                </a:gs>
+              </a:gsLst>
+              <a:lin ang="5400000" scaled="0"/>
+            </a:gradFill>
+            <a:ln>
+              <a:noFill/>
+            </a:ln>
+          </p:spPr>
+          <p:txBody>
+            <a:bodyPr spcFirstLastPara="1" wrap="square" lIns="91425" tIns="45700" rIns="91425" bIns="45700" anchor="ctr" anchorCtr="0">
+              <a:noAutofit/>
+            </a:bodyPr>
+            <a:lstStyle/>
+            <a:p>
+              <a:pPr marL="0" marR="0" lvl="0" indent="0" algn="ctr" rtl="0">
+                <a:spcBef>
+                  <a:spcPts val="0"/>
+                </a:spcBef>
+                <a:spcAft>
+                  <a:spcPts val="0"/>
+                </a:spcAft>
+                <a:buNone/>
+              </a:pPr>
+              <a:endParaRPr sz="1800" dirty="0">
+                <a:solidFill>
+                  <a:schemeClr val="lt1"/>
+                </a:solidFill>
+                <a:latin typeface="PT Sans" panose="020B0503020203020204" pitchFamily="34" charset="0"/>
+                <a:ea typeface="Calibri"/>
+                <a:cs typeface="Calibri"/>
+                <a:sym typeface="Calibri"/>
+              </a:endParaRPr>
+            </a:p>
+          </p:txBody>
+        </p:sp>
+        <p:pic>
+          <p:nvPicPr>
+            <p:cNvPr id="11" name="Google Shape;134;p5" descr="C:\Users\MSShafigullin\Desktop\2020\Презентация КФУ\kfu_logo_circle_rus.png">
+              <a:extLst>
+                <a:ext uri="{FF2B5EF4-FFF2-40B4-BE49-F238E27FC236}">
+                  <a16:creationId xmlns:a16="http://schemas.microsoft.com/office/drawing/2014/main" id="{25CDED6D-DB62-6B41-9BFC-DFBDD55047A7}"/>
+                </a:ext>
+              </a:extLst>
+            </p:cNvPr>
+            <p:cNvPicPr preferRelativeResize="0"/>
+            <p:nvPr/>
+          </p:nvPicPr>
+          <p:blipFill rotWithShape="1">
+            <a:blip r:embed="rId3">
+              <a:alphaModFix/>
+            </a:blip>
+            <a:srcRect/>
+            <a:stretch/>
+          </p:blipFill>
+          <p:spPr>
+            <a:xfrm>
+              <a:off x="137267" y="148256"/>
+              <a:ext cx="553050" cy="540000"/>
+            </a:xfrm>
+            <a:prstGeom prst="rect">
+              <a:avLst/>
+            </a:prstGeom>
+            <a:noFill/>
+            <a:ln>
+              <a:noFill/>
+            </a:ln>
+          </p:spPr>
+        </p:pic>
+        <p:sp>
+          <p:nvSpPr>
+            <p:cNvPr id="12" name="Google Shape;135;p5">
+              <a:extLst>
+                <a:ext uri="{FF2B5EF4-FFF2-40B4-BE49-F238E27FC236}">
+                  <a16:creationId xmlns:a16="http://schemas.microsoft.com/office/drawing/2014/main" id="{B90A0E07-9A35-E74D-859C-8109875E2889}"/>
+                </a:ext>
+              </a:extLst>
+            </p:cNvPr>
+            <p:cNvSpPr txBox="1"/>
+            <p:nvPr/>
+          </p:nvSpPr>
+          <p:spPr>
+            <a:xfrm>
+              <a:off x="835887" y="240719"/>
+              <a:ext cx="7344900" cy="321682"/>
+            </a:xfrm>
+            <a:prstGeom prst="rect">
+              <a:avLst/>
+            </a:prstGeom>
+            <a:noFill/>
+            <a:ln>
+              <a:noFill/>
+            </a:ln>
+          </p:spPr>
+          <p:txBody>
+            <a:bodyPr spcFirstLastPara="1" wrap="square" lIns="91425" tIns="45700" rIns="91425" bIns="45700" anchor="t" anchorCtr="0">
+              <a:spAutoFit/>
+            </a:bodyPr>
+            <a:lstStyle/>
+            <a:p>
+              <a:pPr lvl="0"/>
+              <a:r>
+                <a:rPr lang="ru-RU" sz="2000" dirty="0">
+                  <a:solidFill>
+                    <a:schemeClr val="lt1"/>
+                  </a:solidFill>
+                  <a:latin typeface="PT Sans" panose="020B0503020203020204" pitchFamily="34" charset="0"/>
+                  <a:ea typeface="PT Sans"/>
+                  <a:cs typeface="PT Sans"/>
+                  <a:sym typeface="PT Sans"/>
+                </a:rPr>
+                <a:t>Гиперпараметры </a:t>
+              </a:r>
+              <a:r>
+                <a:rPr lang="en-US" sz="2000" dirty="0">
+                  <a:solidFill>
+                    <a:schemeClr val="lt1"/>
+                  </a:solidFill>
+                  <a:latin typeface="PT Sans" panose="020B0503020203020204" pitchFamily="34" charset="0"/>
+                  <a:ea typeface="PT Sans"/>
+                  <a:cs typeface="PT Sans"/>
+                  <a:sym typeface="PT Sans"/>
+                </a:rPr>
+                <a:t>SVM (</a:t>
+              </a:r>
+              <a:r>
+                <a:rPr lang="en-US" sz="2000" dirty="0" err="1">
+                  <a:solidFill>
+                    <a:schemeClr val="lt1"/>
+                  </a:solidFill>
+                  <a:latin typeface="PT Sans" panose="020B0503020203020204" pitchFamily="34" charset="0"/>
+                  <a:ea typeface="PT Sans"/>
+                  <a:cs typeface="PT Sans"/>
+                  <a:sym typeface="PT Sans"/>
+                </a:rPr>
+                <a:t>svmRadial</a:t>
+              </a:r>
+              <a:r>
+                <a:rPr lang="en-US" sz="2000" dirty="0">
+                  <a:solidFill>
+                    <a:schemeClr val="lt1"/>
+                  </a:solidFill>
+                  <a:latin typeface="PT Sans" panose="020B0503020203020204" pitchFamily="34" charset="0"/>
+                  <a:ea typeface="PT Sans"/>
+                  <a:cs typeface="PT Sans"/>
+                  <a:sym typeface="PT Sans"/>
+                </a:rPr>
+                <a:t>)</a:t>
+              </a:r>
+              <a:endParaRPr lang="ru-RU" sz="2000" dirty="0">
+                <a:solidFill>
+                  <a:schemeClr val="lt1"/>
+                </a:solidFill>
+                <a:latin typeface="PT Sans" panose="020B0503020203020204" pitchFamily="34" charset="0"/>
+                <a:ea typeface="PT Sans"/>
+                <a:cs typeface="PT Sans"/>
+                <a:sym typeface="PT Sans"/>
+              </a:endParaRPr>
+            </a:p>
+          </p:txBody>
+        </p:sp>
+        <p:pic>
+          <p:nvPicPr>
+            <p:cNvPr id="14" name="Google Shape;136;p5" descr="C:\Users\MSShafigullin\Desktop\Проекты\Презентация по ДК\qs.jpg">
+              <a:extLst>
+                <a:ext uri="{FF2B5EF4-FFF2-40B4-BE49-F238E27FC236}">
+                  <a16:creationId xmlns:a16="http://schemas.microsoft.com/office/drawing/2014/main" id="{9F8DFA2B-AC78-464C-BC1D-62929B6D8A97}"/>
+                </a:ext>
+              </a:extLst>
+            </p:cNvPr>
+            <p:cNvPicPr preferRelativeResize="0"/>
+            <p:nvPr/>
+          </p:nvPicPr>
+          <p:blipFill rotWithShape="1">
+            <a:blip r:embed="rId4">
+              <a:alphaModFix/>
+            </a:blip>
+            <a:srcRect/>
+            <a:stretch/>
+          </p:blipFill>
+          <p:spPr>
+            <a:xfrm>
+              <a:off x="7878094" y="367563"/>
+              <a:ext cx="353386" cy="353386"/>
+            </a:xfrm>
+            <a:prstGeom prst="rect">
+              <a:avLst/>
+            </a:prstGeom>
+            <a:noFill/>
+            <a:ln>
+              <a:noFill/>
+            </a:ln>
+          </p:spPr>
+        </p:pic>
+        <p:pic>
+          <p:nvPicPr>
+            <p:cNvPr id="15" name="Google Shape;137;p5" descr="C:\Users\MSShafigullin\Desktop\2020\Презентация КФУ\THE.png">
+              <a:extLst>
+                <a:ext uri="{FF2B5EF4-FFF2-40B4-BE49-F238E27FC236}">
+                  <a16:creationId xmlns:a16="http://schemas.microsoft.com/office/drawing/2014/main" id="{835D2624-2EF8-2144-9816-A09872F47777}"/>
+                </a:ext>
+              </a:extLst>
+            </p:cNvPr>
+            <p:cNvPicPr preferRelativeResize="0"/>
+            <p:nvPr/>
+          </p:nvPicPr>
+          <p:blipFill rotWithShape="1">
+            <a:blip r:embed="rId5">
+              <a:alphaModFix/>
+            </a:blip>
+            <a:srcRect/>
+            <a:stretch/>
+          </p:blipFill>
+          <p:spPr>
+            <a:xfrm>
+              <a:off x="7928787" y="114719"/>
+              <a:ext cx="252000" cy="252000"/>
+            </a:xfrm>
+            <a:prstGeom prst="rect">
+              <a:avLst/>
+            </a:prstGeom>
+            <a:noFill/>
+            <a:ln>
+              <a:noFill/>
+            </a:ln>
+          </p:spPr>
+        </p:pic>
+        <p:sp>
+          <p:nvSpPr>
+            <p:cNvPr id="16" name="Google Shape;138;p5">
+              <a:extLst>
+                <a:ext uri="{FF2B5EF4-FFF2-40B4-BE49-F238E27FC236}">
+                  <a16:creationId xmlns:a16="http://schemas.microsoft.com/office/drawing/2014/main" id="{841F1A31-5CCC-E941-956A-F47E7E67D768}"/>
+                </a:ext>
+              </a:extLst>
+            </p:cNvPr>
+            <p:cNvSpPr txBox="1"/>
+            <p:nvPr/>
+          </p:nvSpPr>
+          <p:spPr>
+            <a:xfrm>
+              <a:off x="8279432" y="374979"/>
+              <a:ext cx="659482" cy="272188"/>
+            </a:xfrm>
+            <a:prstGeom prst="rect">
+              <a:avLst/>
+            </a:prstGeom>
+            <a:noFill/>
+            <a:ln>
+              <a:noFill/>
+            </a:ln>
+          </p:spPr>
+          <p:txBody>
+            <a:bodyPr spcFirstLastPara="1" wrap="square" lIns="91425" tIns="45700" rIns="91425" bIns="45700" anchor="t" anchorCtr="0">
+              <a:spAutoFit/>
+            </a:bodyPr>
+            <a:lstStyle/>
+            <a:p>
+              <a:pPr marL="0" marR="0" lvl="0" indent="0" algn="l" rtl="0">
+                <a:lnSpc>
+                  <a:spcPct val="100000"/>
+                </a:lnSpc>
+                <a:spcBef>
+                  <a:spcPts val="0"/>
+                </a:spcBef>
+                <a:spcAft>
+                  <a:spcPts val="0"/>
+                </a:spcAft>
+                <a:buClr>
+                  <a:schemeClr val="lt1"/>
+                </a:buClr>
+                <a:buSzPts val="800"/>
+                <a:buFont typeface="PT Sans"/>
+                <a:buNone/>
+              </a:pPr>
+              <a:r>
+                <a:rPr lang="ru-RU" sz="800" b="0">
+                  <a:solidFill>
+                    <a:schemeClr val="lt1"/>
+                  </a:solidFill>
+                  <a:latin typeface="PT Sans" panose="020B0503020203020204" pitchFamily="34" charset="0"/>
+                  <a:ea typeface="PT Sans"/>
+                  <a:cs typeface="PT Sans"/>
+                  <a:sym typeface="PT Sans"/>
+                </a:rPr>
+                <a:t>370</a:t>
+              </a:r>
+              <a:endParaRPr>
+                <a:latin typeface="PT Sans" panose="020B0503020203020204" pitchFamily="34" charset="0"/>
+              </a:endParaRPr>
+            </a:p>
+            <a:p>
+              <a:pPr marL="0" marR="0" lvl="0" indent="0" algn="l" rtl="0">
+                <a:lnSpc>
+                  <a:spcPct val="100000"/>
+                </a:lnSpc>
+                <a:spcBef>
+                  <a:spcPts val="0"/>
+                </a:spcBef>
+                <a:spcAft>
+                  <a:spcPts val="0"/>
+                </a:spcAft>
+                <a:buClr>
+                  <a:schemeClr val="lt1"/>
+                </a:buClr>
+                <a:buSzPts val="800"/>
+                <a:buFont typeface="PT Sans"/>
+                <a:buNone/>
+              </a:pPr>
+              <a:r>
+                <a:rPr lang="ru-RU" sz="800" b="0" u="none" strike="noStrike" cap="none">
+                  <a:solidFill>
+                    <a:schemeClr val="lt1"/>
+                  </a:solidFill>
+                  <a:latin typeface="PT Sans" panose="020B0503020203020204" pitchFamily="34" charset="0"/>
+                  <a:ea typeface="PT Sans"/>
+                  <a:cs typeface="PT Sans"/>
+                  <a:sym typeface="PT Sans"/>
+                </a:rPr>
+                <a:t>13</a:t>
+              </a:r>
+              <a:endParaRPr sz="800" b="0" u="none" strike="noStrike" cap="none">
+                <a:solidFill>
+                  <a:schemeClr val="lt1"/>
+                </a:solidFill>
+                <a:latin typeface="PT Sans" panose="020B0503020203020204" pitchFamily="34" charset="0"/>
+                <a:ea typeface="PT Sans"/>
+                <a:cs typeface="PT Sans"/>
+                <a:sym typeface="PT Sans"/>
+              </a:endParaRPr>
+            </a:p>
+          </p:txBody>
+        </p:sp>
+        <p:sp>
+          <p:nvSpPr>
+            <p:cNvPr id="17" name="Google Shape;139;p5">
+              <a:extLst>
+                <a:ext uri="{FF2B5EF4-FFF2-40B4-BE49-F238E27FC236}">
+                  <a16:creationId xmlns:a16="http://schemas.microsoft.com/office/drawing/2014/main" id="{A28DBFF6-9F47-6244-B20A-895959377BC2}"/>
+                </a:ext>
+              </a:extLst>
+            </p:cNvPr>
+            <p:cNvSpPr txBox="1"/>
+            <p:nvPr/>
+          </p:nvSpPr>
+          <p:spPr>
+            <a:xfrm>
+              <a:off x="8279432" y="71442"/>
+              <a:ext cx="659482" cy="272188"/>
+            </a:xfrm>
+            <a:prstGeom prst="rect">
+              <a:avLst/>
+            </a:prstGeom>
+            <a:noFill/>
+            <a:ln>
+              <a:noFill/>
+            </a:ln>
+          </p:spPr>
+          <p:txBody>
+            <a:bodyPr spcFirstLastPara="1" wrap="square" lIns="91425" tIns="45700" rIns="91425" bIns="45700" anchor="t" anchorCtr="0">
+              <a:spAutoFit/>
+            </a:bodyPr>
+            <a:lstStyle/>
+            <a:p>
+              <a:pPr marL="0" marR="0" lvl="0" indent="0" algn="l" rtl="0">
+                <a:lnSpc>
+                  <a:spcPct val="100000"/>
+                </a:lnSpc>
+                <a:spcBef>
+                  <a:spcPts val="0"/>
+                </a:spcBef>
+                <a:spcAft>
+                  <a:spcPts val="0"/>
+                </a:spcAft>
+                <a:buClr>
+                  <a:schemeClr val="lt1"/>
+                </a:buClr>
+                <a:buSzPts val="800"/>
+                <a:buFont typeface="PT Sans"/>
+                <a:buNone/>
+              </a:pPr>
+              <a:r>
+                <a:rPr lang="ru-RU" sz="800" b="0">
+                  <a:solidFill>
+                    <a:schemeClr val="lt1"/>
+                  </a:solidFill>
+                  <a:latin typeface="PT Sans" panose="020B0503020203020204" pitchFamily="34" charset="0"/>
+                  <a:ea typeface="PT Sans"/>
+                  <a:cs typeface="PT Sans"/>
+                  <a:sym typeface="PT Sans"/>
+                </a:rPr>
+                <a:t>601-800</a:t>
+              </a:r>
+              <a:endParaRPr>
+                <a:latin typeface="PT Sans" panose="020B0503020203020204" pitchFamily="34" charset="0"/>
+              </a:endParaRPr>
+            </a:p>
+            <a:p>
+              <a:pPr marL="0" marR="0" lvl="0" indent="0" algn="l" rtl="0">
+                <a:lnSpc>
+                  <a:spcPct val="100000"/>
+                </a:lnSpc>
+                <a:spcBef>
+                  <a:spcPts val="0"/>
+                </a:spcBef>
+                <a:spcAft>
+                  <a:spcPts val="0"/>
+                </a:spcAft>
+                <a:buClr>
+                  <a:schemeClr val="lt1"/>
+                </a:buClr>
+                <a:buSzPts val="800"/>
+                <a:buFont typeface="PT Sans"/>
+                <a:buNone/>
+              </a:pPr>
+              <a:r>
+                <a:rPr lang="ru-RU" sz="800" b="0" u="none" strike="noStrike" cap="none">
+                  <a:solidFill>
+                    <a:schemeClr val="lt1"/>
+                  </a:solidFill>
+                  <a:latin typeface="PT Sans" panose="020B0503020203020204" pitchFamily="34" charset="0"/>
+                  <a:ea typeface="PT Sans"/>
+                  <a:cs typeface="PT Sans"/>
+                  <a:sym typeface="PT Sans"/>
+                </a:rPr>
+                <a:t>9</a:t>
+              </a:r>
+              <a:endParaRPr sz="800" b="0" u="none" strike="noStrike" cap="none">
+                <a:solidFill>
+                  <a:schemeClr val="lt1"/>
+                </a:solidFill>
+                <a:latin typeface="PT Sans" panose="020B0503020203020204" pitchFamily="34" charset="0"/>
+                <a:ea typeface="PT Sans"/>
+                <a:cs typeface="PT Sans"/>
+                <a:sym typeface="PT Sans"/>
+              </a:endParaRPr>
+            </a:p>
+          </p:txBody>
+        </p:sp>
+      </p:grpSp>
+      <p:sp>
+        <p:nvSpPr>
+          <p:cNvPr id="19" name="Объект 2">
+            <a:extLst>
+              <a:ext uri="{FF2B5EF4-FFF2-40B4-BE49-F238E27FC236}">
+                <a16:creationId xmlns:a16="http://schemas.microsoft.com/office/drawing/2014/main" id="{30C61546-9215-4D0C-81CB-5EE3A5637E25}"/>
+              </a:ext>
+            </a:extLst>
+          </p:cNvPr>
+          <p:cNvSpPr>
+            <a:spLocks noGrp="1"/>
+          </p:cNvSpPr>
+          <p:nvPr>
+            <p:ph idx="1"/>
+          </p:nvPr>
+        </p:nvSpPr>
+        <p:spPr>
+          <a:xfrm>
+            <a:off x="174322" y="1180353"/>
+            <a:ext cx="11423283" cy="5677647"/>
+          </a:xfrm>
+        </p:spPr>
+        <p:txBody>
+          <a:bodyPr>
+            <a:normAutofit/>
+          </a:bodyPr>
+          <a:lstStyle/>
+          <a:p>
+            <a:pPr algn="l">
+              <a:buFont typeface="Arial" panose="020B0604020202020204" pitchFamily="34" charset="0"/>
+              <a:buChar char="•"/>
+            </a:pPr>
+            <a:r>
+              <a:rPr lang="ru-RU" i="0" dirty="0">
+                <a:effectLst/>
+              </a:rPr>
+              <a:t>C — штраф за ошибки классификации:</a:t>
+            </a:r>
+          </a:p>
+          <a:p>
+            <a:pPr marL="742950" lvl="1" indent="-285750" algn="l">
+              <a:buFont typeface="Arial" panose="020B0604020202020204" pitchFamily="34" charset="0"/>
+              <a:buChar char="•"/>
+            </a:pPr>
+            <a:r>
+              <a:rPr lang="ru-RU" i="0" dirty="0">
+                <a:effectLst/>
+              </a:rPr>
+              <a:t>большой C → модель сильнее наказывает ошибки, граница становится «жёсткой», риск переобучения;</a:t>
+            </a:r>
+          </a:p>
+          <a:p>
+            <a:pPr marL="742950" lvl="1" indent="-285750" algn="l">
+              <a:buFont typeface="Arial" panose="020B0604020202020204" pitchFamily="34" charset="0"/>
+              <a:buChar char="•"/>
+            </a:pPr>
+            <a:r>
+              <a:rPr lang="ru-RU" i="0" dirty="0">
+                <a:effectLst/>
+              </a:rPr>
+              <a:t>маленький C → более гладкая граница, больше ошибок на обучении, лучше обобщение.</a:t>
+            </a:r>
+          </a:p>
+          <a:p>
+            <a:pPr algn="l">
+              <a:buFont typeface="Arial" panose="020B0604020202020204" pitchFamily="34" charset="0"/>
+              <a:buChar char="•"/>
+            </a:pPr>
+            <a:r>
+              <a:rPr lang="ru-RU" i="0" dirty="0">
+                <a:effectLst/>
+              </a:rPr>
+              <a:t>σ (</a:t>
+            </a:r>
+            <a:r>
+              <a:rPr lang="ru-RU" i="0" dirty="0" err="1">
+                <a:effectLst/>
+              </a:rPr>
+              <a:t>sigma</a:t>
+            </a:r>
+            <a:r>
+              <a:rPr lang="ru-RU" i="0" dirty="0">
+                <a:effectLst/>
+              </a:rPr>
+              <a:t>) — параметр RBF‑ядра (ширина </a:t>
+            </a:r>
+            <a:r>
+              <a:rPr lang="ru-RU" i="0" dirty="0" err="1">
+                <a:effectLst/>
+              </a:rPr>
+              <a:t>гауссианы</a:t>
+            </a:r>
+            <a:r>
+              <a:rPr lang="ru-RU" i="0" dirty="0">
+                <a:effectLst/>
+              </a:rPr>
+              <a:t>):</a:t>
+            </a:r>
+          </a:p>
+          <a:p>
+            <a:pPr marL="742950" lvl="1" indent="-285750" algn="l">
+              <a:buFont typeface="Arial" panose="020B0604020202020204" pitchFamily="34" charset="0"/>
+              <a:buChar char="•"/>
+            </a:pPr>
+            <a:r>
+              <a:rPr lang="ru-RU" i="0" dirty="0">
+                <a:effectLst/>
+              </a:rPr>
+              <a:t>маленький </a:t>
+            </a:r>
+            <a:r>
+              <a:rPr lang="ru-RU" i="0" dirty="0" err="1">
+                <a:effectLst/>
+              </a:rPr>
+              <a:t>sigma</a:t>
+            </a:r>
+            <a:r>
+              <a:rPr lang="ru-RU" i="0" dirty="0">
+                <a:effectLst/>
+              </a:rPr>
+              <a:t> → высокая гибкость, сложная граница (риск переобучения);</a:t>
+            </a:r>
+          </a:p>
+          <a:p>
+            <a:pPr marL="742950" lvl="1" indent="-285750" algn="l">
+              <a:buFont typeface="Arial" panose="020B0604020202020204" pitchFamily="34" charset="0"/>
+              <a:buChar char="•"/>
+            </a:pPr>
+            <a:r>
+              <a:rPr lang="ru-RU" i="0" dirty="0">
+                <a:effectLst/>
+              </a:rPr>
+              <a:t>большой </a:t>
+            </a:r>
+            <a:r>
+              <a:rPr lang="ru-RU" i="0" dirty="0" err="1">
+                <a:effectLst/>
+              </a:rPr>
+              <a:t>sigma</a:t>
+            </a:r>
+            <a:r>
+              <a:rPr lang="ru-RU" i="0" dirty="0">
+                <a:effectLst/>
+              </a:rPr>
+              <a:t> → гладкая, почти линейная граница.</a:t>
+            </a:r>
+          </a:p>
+          <a:p>
+            <a:pPr algn="l">
+              <a:buFont typeface="Arial" panose="020B0604020202020204" pitchFamily="34" charset="0"/>
+              <a:buChar char="•"/>
+            </a:pPr>
+            <a:r>
+              <a:rPr lang="ru-RU" i="0" dirty="0">
+                <a:effectLst/>
+              </a:rPr>
+              <a:t>Наша сетка: C∈{0.25,1,4}, σ∈{0.01,0.05,0.1}.</a:t>
+            </a:r>
+            <a:br>
+              <a:rPr lang="ru-RU" dirty="0"/>
+            </a:br>
+            <a:endParaRPr lang="en-US" i="0" dirty="0">
+              <a:effectLst/>
+            </a:endParaRPr>
+          </a:p>
+        </p:txBody>
+      </p:sp>
+    </p:spTree>
+    <p:extLst>
+      <p:ext uri="{BB962C8B-B14F-4D97-AF65-F5344CB8AC3E}">
+        <p14:creationId xmlns:p14="http://schemas.microsoft.com/office/powerpoint/2010/main" val="1839927163"/>
+      </p:ext>
+    </p:extLst>
+  </p:cSld>
+  <p:clrMapOvr>
+    <a:masterClrMapping/>
+  </p:clrMapOvr>
+</p:sld>
+</file>
+
+<file path=ppt/slides/slide21.xml><?xml version="1.0" encoding="utf-8"?>
+<p:sld xmlns:a="http://schemas.openxmlformats.org/drawingml/2006/main" xmlns:r="http://schemas.openxmlformats.org/officeDocument/2006/relationships" xmlns:p="http://schemas.openxmlformats.org/presentationml/2006/main">
+  <p:cSld>
+    <p:spTree>
+      <p:nvGrpSpPr>
+        <p:cNvPr id="1" name=""/>
+        <p:cNvGrpSpPr/>
+        <p:nvPr/>
+      </p:nvGrpSpPr>
+      <p:grpSpPr>
+        <a:xfrm>
+          <a:off x="0" y="0"/>
+          <a:ext cx="0" cy="0"/>
+          <a:chOff x="0" y="0"/>
+          <a:chExt cx="0" cy="0"/>
+        </a:xfrm>
+      </p:grpSpPr>
+      <p:sp>
+        <p:nvSpPr>
+          <p:cNvPr id="13" name="Номер слайда 12"/>
+          <p:cNvSpPr>
+            <a:spLocks noGrp="1"/>
+          </p:cNvSpPr>
+          <p:nvPr>
+            <p:ph type="sldNum" sz="quarter" idx="12"/>
+          </p:nvPr>
+        </p:nvSpPr>
+        <p:spPr>
+          <a:xfrm>
+            <a:off x="9274478" y="6356350"/>
+            <a:ext cx="2743200" cy="365125"/>
+          </a:xfrm>
+        </p:spPr>
+        <p:txBody>
+          <a:bodyPr/>
+          <a:lstStyle/>
+          <a:p>
+            <a:fld id="{B19B0651-EE4F-4900-A07F-96A6BFA9D0F0}" type="slidenum">
+              <a:rPr lang="ru-RU" smtClean="0">
+                <a:latin typeface="PT Sans" panose="020B0503020203020204" pitchFamily="34" charset="0"/>
+              </a:rPr>
+              <a:pPr/>
+              <a:t>21</a:t>
+            </a:fld>
+            <a:endParaRPr lang="ru-RU" dirty="0">
+              <a:latin typeface="PT Sans" panose="020B0503020203020204" pitchFamily="34" charset="0"/>
+            </a:endParaRPr>
+          </a:p>
+        </p:txBody>
+      </p:sp>
+      <p:grpSp>
+        <p:nvGrpSpPr>
+          <p:cNvPr id="9" name="Группа 8">
+            <a:extLst>
+              <a:ext uri="{FF2B5EF4-FFF2-40B4-BE49-F238E27FC236}">
+                <a16:creationId xmlns:a16="http://schemas.microsoft.com/office/drawing/2014/main" id="{D7342440-FCEE-2E4F-950F-6FE7857B3EB5}"/>
+              </a:ext>
+            </a:extLst>
+          </p:cNvPr>
+          <p:cNvGrpSpPr/>
+          <p:nvPr/>
+        </p:nvGrpSpPr>
+        <p:grpSpPr>
+          <a:xfrm>
+            <a:off x="0" y="-4966"/>
+            <a:ext cx="12192000" cy="1035565"/>
+            <a:chOff x="0" y="1924"/>
+            <a:chExt cx="9144000" cy="832664"/>
+          </a:xfrm>
+        </p:grpSpPr>
+        <p:sp>
+          <p:nvSpPr>
+            <p:cNvPr id="10" name="Google Shape;133;p5">
+              <a:extLst>
+                <a:ext uri="{FF2B5EF4-FFF2-40B4-BE49-F238E27FC236}">
+                  <a16:creationId xmlns:a16="http://schemas.microsoft.com/office/drawing/2014/main" id="{E1FF157E-1AAE-A345-AC22-C4FE991023F3}"/>
+                </a:ext>
+              </a:extLst>
+            </p:cNvPr>
+            <p:cNvSpPr/>
+            <p:nvPr/>
+          </p:nvSpPr>
+          <p:spPr>
+            <a:xfrm>
+              <a:off x="0" y="1924"/>
+              <a:ext cx="9144000" cy="832664"/>
+            </a:xfrm>
+            <a:prstGeom prst="rect">
+              <a:avLst/>
+            </a:prstGeom>
+            <a:gradFill>
+              <a:gsLst>
+                <a:gs pos="0">
+                  <a:srgbClr val="003061"/>
+                </a:gs>
+                <a:gs pos="50000">
+                  <a:srgbClr val="00468D"/>
+                </a:gs>
+                <a:gs pos="100000">
+                  <a:srgbClr val="0054AA"/>
+                </a:gs>
+              </a:gsLst>
+              <a:lin ang="5400000" scaled="0"/>
+            </a:gradFill>
+            <a:ln>
+              <a:noFill/>
+            </a:ln>
+          </p:spPr>
+          <p:txBody>
+            <a:bodyPr spcFirstLastPara="1" wrap="square" lIns="91425" tIns="45700" rIns="91425" bIns="45700" anchor="ctr" anchorCtr="0">
+              <a:noAutofit/>
+            </a:bodyPr>
+            <a:lstStyle/>
+            <a:p>
+              <a:pPr marL="0" marR="0" lvl="0" indent="0" algn="ctr" rtl="0">
+                <a:spcBef>
+                  <a:spcPts val="0"/>
+                </a:spcBef>
+                <a:spcAft>
+                  <a:spcPts val="0"/>
+                </a:spcAft>
+                <a:buNone/>
+              </a:pPr>
+              <a:endParaRPr sz="1800" dirty="0">
+                <a:solidFill>
+                  <a:schemeClr val="lt1"/>
+                </a:solidFill>
+                <a:latin typeface="PT Sans" panose="020B0503020203020204" pitchFamily="34" charset="0"/>
+                <a:ea typeface="Calibri"/>
+                <a:cs typeface="Calibri"/>
+                <a:sym typeface="Calibri"/>
+              </a:endParaRPr>
+            </a:p>
+          </p:txBody>
+        </p:sp>
+        <p:pic>
+          <p:nvPicPr>
+            <p:cNvPr id="11" name="Google Shape;134;p5" descr="C:\Users\MSShafigullin\Desktop\2020\Презентация КФУ\kfu_logo_circle_rus.png">
+              <a:extLst>
+                <a:ext uri="{FF2B5EF4-FFF2-40B4-BE49-F238E27FC236}">
+                  <a16:creationId xmlns:a16="http://schemas.microsoft.com/office/drawing/2014/main" id="{25CDED6D-DB62-6B41-9BFC-DFBDD55047A7}"/>
+                </a:ext>
+              </a:extLst>
+            </p:cNvPr>
+            <p:cNvPicPr preferRelativeResize="0"/>
+            <p:nvPr/>
+          </p:nvPicPr>
+          <p:blipFill rotWithShape="1">
+            <a:blip r:embed="rId3">
+              <a:alphaModFix/>
+            </a:blip>
+            <a:srcRect/>
+            <a:stretch/>
+          </p:blipFill>
+          <p:spPr>
+            <a:xfrm>
+              <a:off x="137267" y="148256"/>
+              <a:ext cx="553050" cy="540000"/>
+            </a:xfrm>
+            <a:prstGeom prst="rect">
+              <a:avLst/>
+            </a:prstGeom>
+            <a:noFill/>
+            <a:ln>
+              <a:noFill/>
+            </a:ln>
+          </p:spPr>
+        </p:pic>
+        <p:sp>
+          <p:nvSpPr>
+            <p:cNvPr id="12" name="Google Shape;135;p5">
+              <a:extLst>
+                <a:ext uri="{FF2B5EF4-FFF2-40B4-BE49-F238E27FC236}">
+                  <a16:creationId xmlns:a16="http://schemas.microsoft.com/office/drawing/2014/main" id="{B90A0E07-9A35-E74D-859C-8109875E2889}"/>
+                </a:ext>
+              </a:extLst>
+            </p:cNvPr>
+            <p:cNvSpPr txBox="1"/>
+            <p:nvPr/>
+          </p:nvSpPr>
+          <p:spPr>
+            <a:xfrm>
+              <a:off x="835887" y="240719"/>
+              <a:ext cx="7344900" cy="321682"/>
+            </a:xfrm>
+            <a:prstGeom prst="rect">
+              <a:avLst/>
+            </a:prstGeom>
+            <a:noFill/>
+            <a:ln>
+              <a:noFill/>
+            </a:ln>
+          </p:spPr>
+          <p:txBody>
+            <a:bodyPr spcFirstLastPara="1" wrap="square" lIns="91425" tIns="45700" rIns="91425" bIns="45700" anchor="t" anchorCtr="0">
+              <a:spAutoFit/>
+            </a:bodyPr>
+            <a:lstStyle/>
+            <a:p>
+              <a:pPr lvl="0"/>
+              <a:r>
+                <a:rPr lang="en-US" sz="2000" dirty="0">
+                  <a:solidFill>
+                    <a:schemeClr val="lt1"/>
+                  </a:solidFill>
+                  <a:latin typeface="PT Sans" panose="020B0503020203020204" pitchFamily="34" charset="0"/>
+                  <a:ea typeface="PT Sans"/>
+                  <a:cs typeface="PT Sans"/>
+                  <a:sym typeface="PT Sans"/>
+                </a:rPr>
+                <a:t>Grid Search </a:t>
+              </a:r>
+              <a:r>
+                <a:rPr lang="ru-RU" sz="2000" dirty="0">
+                  <a:solidFill>
+                    <a:schemeClr val="lt1"/>
+                  </a:solidFill>
+                  <a:latin typeface="PT Sans" panose="020B0503020203020204" pitchFamily="34" charset="0"/>
+                  <a:ea typeface="PT Sans"/>
+                  <a:cs typeface="PT Sans"/>
+                  <a:sym typeface="PT Sans"/>
+                </a:rPr>
+                <a:t>для </a:t>
+              </a:r>
+              <a:r>
+                <a:rPr lang="en-US" sz="2000" dirty="0">
+                  <a:solidFill>
+                    <a:schemeClr val="lt1"/>
+                  </a:solidFill>
+                  <a:latin typeface="PT Sans" panose="020B0503020203020204" pitchFamily="34" charset="0"/>
+                  <a:ea typeface="PT Sans"/>
+                  <a:cs typeface="PT Sans"/>
+                  <a:sym typeface="PT Sans"/>
+                </a:rPr>
+                <a:t>SVM (Pima)</a:t>
+              </a:r>
+              <a:endParaRPr lang="ru-RU" sz="2000" dirty="0">
+                <a:solidFill>
+                  <a:schemeClr val="lt1"/>
+                </a:solidFill>
+                <a:latin typeface="PT Sans" panose="020B0503020203020204" pitchFamily="34" charset="0"/>
+                <a:ea typeface="PT Sans"/>
+                <a:cs typeface="PT Sans"/>
+                <a:sym typeface="PT Sans"/>
+              </a:endParaRPr>
+            </a:p>
+          </p:txBody>
+        </p:sp>
+        <p:pic>
+          <p:nvPicPr>
+            <p:cNvPr id="14" name="Google Shape;136;p5" descr="C:\Users\MSShafigullin\Desktop\Проекты\Презентация по ДК\qs.jpg">
+              <a:extLst>
+                <a:ext uri="{FF2B5EF4-FFF2-40B4-BE49-F238E27FC236}">
+                  <a16:creationId xmlns:a16="http://schemas.microsoft.com/office/drawing/2014/main" id="{9F8DFA2B-AC78-464C-BC1D-62929B6D8A97}"/>
+                </a:ext>
+              </a:extLst>
+            </p:cNvPr>
+            <p:cNvPicPr preferRelativeResize="0"/>
+            <p:nvPr/>
+          </p:nvPicPr>
+          <p:blipFill rotWithShape="1">
+            <a:blip r:embed="rId4">
+              <a:alphaModFix/>
+            </a:blip>
+            <a:srcRect/>
+            <a:stretch/>
+          </p:blipFill>
+          <p:spPr>
+            <a:xfrm>
+              <a:off x="7878094" y="367563"/>
+              <a:ext cx="353386" cy="353386"/>
+            </a:xfrm>
+            <a:prstGeom prst="rect">
+              <a:avLst/>
+            </a:prstGeom>
+            <a:noFill/>
+            <a:ln>
+              <a:noFill/>
+            </a:ln>
+          </p:spPr>
+        </p:pic>
+        <p:pic>
+          <p:nvPicPr>
+            <p:cNvPr id="15" name="Google Shape;137;p5" descr="C:\Users\MSShafigullin\Desktop\2020\Презентация КФУ\THE.png">
+              <a:extLst>
+                <a:ext uri="{FF2B5EF4-FFF2-40B4-BE49-F238E27FC236}">
+                  <a16:creationId xmlns:a16="http://schemas.microsoft.com/office/drawing/2014/main" id="{835D2624-2EF8-2144-9816-A09872F47777}"/>
+                </a:ext>
+              </a:extLst>
+            </p:cNvPr>
+            <p:cNvPicPr preferRelativeResize="0"/>
+            <p:nvPr/>
+          </p:nvPicPr>
+          <p:blipFill rotWithShape="1">
+            <a:blip r:embed="rId5">
+              <a:alphaModFix/>
+            </a:blip>
+            <a:srcRect/>
+            <a:stretch/>
+          </p:blipFill>
+          <p:spPr>
+            <a:xfrm>
+              <a:off x="7928787" y="114719"/>
+              <a:ext cx="252000" cy="252000"/>
+            </a:xfrm>
+            <a:prstGeom prst="rect">
+              <a:avLst/>
+            </a:prstGeom>
+            <a:noFill/>
+            <a:ln>
+              <a:noFill/>
+            </a:ln>
+          </p:spPr>
+        </p:pic>
+        <p:sp>
+          <p:nvSpPr>
+            <p:cNvPr id="16" name="Google Shape;138;p5">
+              <a:extLst>
+                <a:ext uri="{FF2B5EF4-FFF2-40B4-BE49-F238E27FC236}">
+                  <a16:creationId xmlns:a16="http://schemas.microsoft.com/office/drawing/2014/main" id="{841F1A31-5CCC-E941-956A-F47E7E67D768}"/>
+                </a:ext>
+              </a:extLst>
+            </p:cNvPr>
+            <p:cNvSpPr txBox="1"/>
+            <p:nvPr/>
+          </p:nvSpPr>
+          <p:spPr>
+            <a:xfrm>
+              <a:off x="8279432" y="374979"/>
+              <a:ext cx="659482" cy="272188"/>
+            </a:xfrm>
+            <a:prstGeom prst="rect">
+              <a:avLst/>
+            </a:prstGeom>
+            <a:noFill/>
+            <a:ln>
+              <a:noFill/>
+            </a:ln>
+          </p:spPr>
+          <p:txBody>
+            <a:bodyPr spcFirstLastPara="1" wrap="square" lIns="91425" tIns="45700" rIns="91425" bIns="45700" anchor="t" anchorCtr="0">
+              <a:spAutoFit/>
+            </a:bodyPr>
+            <a:lstStyle/>
+            <a:p>
+              <a:pPr marL="0" marR="0" lvl="0" indent="0" algn="l" rtl="0">
+                <a:lnSpc>
+                  <a:spcPct val="100000"/>
+                </a:lnSpc>
+                <a:spcBef>
+                  <a:spcPts val="0"/>
+                </a:spcBef>
+                <a:spcAft>
+                  <a:spcPts val="0"/>
+                </a:spcAft>
+                <a:buClr>
+                  <a:schemeClr val="lt1"/>
+                </a:buClr>
+                <a:buSzPts val="800"/>
+                <a:buFont typeface="PT Sans"/>
+                <a:buNone/>
+              </a:pPr>
+              <a:r>
+                <a:rPr lang="ru-RU" sz="800" b="0">
+                  <a:solidFill>
+                    <a:schemeClr val="lt1"/>
+                  </a:solidFill>
+                  <a:latin typeface="PT Sans" panose="020B0503020203020204" pitchFamily="34" charset="0"/>
+                  <a:ea typeface="PT Sans"/>
+                  <a:cs typeface="PT Sans"/>
+                  <a:sym typeface="PT Sans"/>
+                </a:rPr>
+                <a:t>370</a:t>
+              </a:r>
+              <a:endParaRPr>
+                <a:latin typeface="PT Sans" panose="020B0503020203020204" pitchFamily="34" charset="0"/>
+              </a:endParaRPr>
+            </a:p>
+            <a:p>
+              <a:pPr marL="0" marR="0" lvl="0" indent="0" algn="l" rtl="0">
+                <a:lnSpc>
+                  <a:spcPct val="100000"/>
+                </a:lnSpc>
+                <a:spcBef>
+                  <a:spcPts val="0"/>
+                </a:spcBef>
+                <a:spcAft>
+                  <a:spcPts val="0"/>
+                </a:spcAft>
+                <a:buClr>
+                  <a:schemeClr val="lt1"/>
+                </a:buClr>
+                <a:buSzPts val="800"/>
+                <a:buFont typeface="PT Sans"/>
+                <a:buNone/>
+              </a:pPr>
+              <a:r>
+                <a:rPr lang="ru-RU" sz="800" b="0" u="none" strike="noStrike" cap="none">
+                  <a:solidFill>
+                    <a:schemeClr val="lt1"/>
+                  </a:solidFill>
+                  <a:latin typeface="PT Sans" panose="020B0503020203020204" pitchFamily="34" charset="0"/>
+                  <a:ea typeface="PT Sans"/>
+                  <a:cs typeface="PT Sans"/>
+                  <a:sym typeface="PT Sans"/>
+                </a:rPr>
+                <a:t>13</a:t>
+              </a:r>
+              <a:endParaRPr sz="800" b="0" u="none" strike="noStrike" cap="none">
+                <a:solidFill>
+                  <a:schemeClr val="lt1"/>
+                </a:solidFill>
+                <a:latin typeface="PT Sans" panose="020B0503020203020204" pitchFamily="34" charset="0"/>
+                <a:ea typeface="PT Sans"/>
+                <a:cs typeface="PT Sans"/>
+                <a:sym typeface="PT Sans"/>
+              </a:endParaRPr>
+            </a:p>
+          </p:txBody>
+        </p:sp>
+        <p:sp>
+          <p:nvSpPr>
+            <p:cNvPr id="17" name="Google Shape;139;p5">
+              <a:extLst>
+                <a:ext uri="{FF2B5EF4-FFF2-40B4-BE49-F238E27FC236}">
+                  <a16:creationId xmlns:a16="http://schemas.microsoft.com/office/drawing/2014/main" id="{A28DBFF6-9F47-6244-B20A-895959377BC2}"/>
+                </a:ext>
+              </a:extLst>
+            </p:cNvPr>
+            <p:cNvSpPr txBox="1"/>
+            <p:nvPr/>
+          </p:nvSpPr>
+          <p:spPr>
+            <a:xfrm>
+              <a:off x="8279432" y="71442"/>
+              <a:ext cx="659482" cy="272188"/>
+            </a:xfrm>
+            <a:prstGeom prst="rect">
+              <a:avLst/>
+            </a:prstGeom>
+            <a:noFill/>
+            <a:ln>
+              <a:noFill/>
+            </a:ln>
+          </p:spPr>
+          <p:txBody>
+            <a:bodyPr spcFirstLastPara="1" wrap="square" lIns="91425" tIns="45700" rIns="91425" bIns="45700" anchor="t" anchorCtr="0">
+              <a:spAutoFit/>
+            </a:bodyPr>
+            <a:lstStyle/>
+            <a:p>
+              <a:pPr marL="0" marR="0" lvl="0" indent="0" algn="l" rtl="0">
+                <a:lnSpc>
+                  <a:spcPct val="100000"/>
+                </a:lnSpc>
+                <a:spcBef>
+                  <a:spcPts val="0"/>
+                </a:spcBef>
+                <a:spcAft>
+                  <a:spcPts val="0"/>
+                </a:spcAft>
+                <a:buClr>
+                  <a:schemeClr val="lt1"/>
+                </a:buClr>
+                <a:buSzPts val="800"/>
+                <a:buFont typeface="PT Sans"/>
+                <a:buNone/>
+              </a:pPr>
+              <a:r>
+                <a:rPr lang="ru-RU" sz="800" b="0">
+                  <a:solidFill>
+                    <a:schemeClr val="lt1"/>
+                  </a:solidFill>
+                  <a:latin typeface="PT Sans" panose="020B0503020203020204" pitchFamily="34" charset="0"/>
+                  <a:ea typeface="PT Sans"/>
+                  <a:cs typeface="PT Sans"/>
+                  <a:sym typeface="PT Sans"/>
+                </a:rPr>
+                <a:t>601-800</a:t>
+              </a:r>
+              <a:endParaRPr>
+                <a:latin typeface="PT Sans" panose="020B0503020203020204" pitchFamily="34" charset="0"/>
+              </a:endParaRPr>
+            </a:p>
+            <a:p>
+              <a:pPr marL="0" marR="0" lvl="0" indent="0" algn="l" rtl="0">
+                <a:lnSpc>
+                  <a:spcPct val="100000"/>
+                </a:lnSpc>
+                <a:spcBef>
+                  <a:spcPts val="0"/>
+                </a:spcBef>
+                <a:spcAft>
+                  <a:spcPts val="0"/>
+                </a:spcAft>
+                <a:buClr>
+                  <a:schemeClr val="lt1"/>
+                </a:buClr>
+                <a:buSzPts val="800"/>
+                <a:buFont typeface="PT Sans"/>
+                <a:buNone/>
+              </a:pPr>
+              <a:r>
+                <a:rPr lang="ru-RU" sz="800" b="0" u="none" strike="noStrike" cap="none">
+                  <a:solidFill>
+                    <a:schemeClr val="lt1"/>
+                  </a:solidFill>
+                  <a:latin typeface="PT Sans" panose="020B0503020203020204" pitchFamily="34" charset="0"/>
+                  <a:ea typeface="PT Sans"/>
+                  <a:cs typeface="PT Sans"/>
+                  <a:sym typeface="PT Sans"/>
+                </a:rPr>
+                <a:t>9</a:t>
+              </a:r>
+              <a:endParaRPr sz="800" b="0" u="none" strike="noStrike" cap="none">
+                <a:solidFill>
+                  <a:schemeClr val="lt1"/>
+                </a:solidFill>
+                <a:latin typeface="PT Sans" panose="020B0503020203020204" pitchFamily="34" charset="0"/>
+                <a:ea typeface="PT Sans"/>
+                <a:cs typeface="PT Sans"/>
+                <a:sym typeface="PT Sans"/>
+              </a:endParaRPr>
+            </a:p>
+          </p:txBody>
+        </p:sp>
+      </p:grpSp>
+      <p:sp>
+        <p:nvSpPr>
+          <p:cNvPr id="19" name="Объект 2">
+            <a:extLst>
+              <a:ext uri="{FF2B5EF4-FFF2-40B4-BE49-F238E27FC236}">
+                <a16:creationId xmlns:a16="http://schemas.microsoft.com/office/drawing/2014/main" id="{30C61546-9215-4D0C-81CB-5EE3A5637E25}"/>
+              </a:ext>
+            </a:extLst>
+          </p:cNvPr>
+          <p:cNvSpPr>
+            <a:spLocks noGrp="1"/>
+          </p:cNvSpPr>
+          <p:nvPr>
+            <p:ph idx="1"/>
+          </p:nvPr>
+        </p:nvSpPr>
+        <p:spPr>
+          <a:xfrm>
+            <a:off x="174322" y="1180353"/>
+            <a:ext cx="11423283" cy="5677647"/>
+          </a:xfrm>
+        </p:spPr>
+        <p:txBody>
+          <a:bodyPr>
+            <a:normAutofit/>
+          </a:bodyPr>
+          <a:lstStyle/>
+          <a:p>
+            <a:pPr algn="l">
+              <a:buFont typeface="Arial" panose="020B0604020202020204" pitchFamily="34" charset="0"/>
+              <a:buChar char="•"/>
+            </a:pPr>
+            <a:r>
+              <a:rPr lang="ru-RU" i="0" dirty="0">
+                <a:effectLst/>
+              </a:rPr>
+              <a:t>Используем </a:t>
+            </a:r>
+            <a:r>
+              <a:rPr lang="en-US" i="0" dirty="0">
+                <a:effectLst/>
+              </a:rPr>
+              <a:t>caret::train() </a:t>
+            </a:r>
+            <a:r>
+              <a:rPr lang="ru-RU" i="0" dirty="0">
+                <a:effectLst/>
+              </a:rPr>
+              <a:t>с </a:t>
+            </a:r>
+            <a:r>
+              <a:rPr lang="en-US" i="0" dirty="0">
+                <a:effectLst/>
+              </a:rPr>
+              <a:t>method = "</a:t>
+            </a:r>
+            <a:r>
+              <a:rPr lang="en-US" i="0" dirty="0" err="1">
+                <a:effectLst/>
+              </a:rPr>
+              <a:t>svmRadial</a:t>
+            </a:r>
+            <a:r>
+              <a:rPr lang="en-US" i="0" dirty="0">
+                <a:effectLst/>
+              </a:rPr>
+              <a:t>".</a:t>
+            </a:r>
+            <a:endParaRPr lang="ru-RU" i="0" dirty="0">
+              <a:effectLst/>
+            </a:endParaRPr>
+          </a:p>
+          <a:p>
+            <a:pPr algn="l">
+              <a:buFont typeface="Arial" panose="020B0604020202020204" pitchFamily="34" charset="0"/>
+              <a:buChar char="•"/>
+            </a:pPr>
+            <a:r>
+              <a:rPr lang="ru-RU" b="0" i="0" dirty="0">
+                <a:effectLst/>
+                <a:latin typeface="pplxSerif"/>
+              </a:rPr>
+              <a:t>Сетка по двум </a:t>
+            </a:r>
+            <a:r>
+              <a:rPr lang="ru-RU" b="0" i="0" dirty="0" err="1">
+                <a:effectLst/>
+                <a:latin typeface="pplxSerif"/>
+              </a:rPr>
+              <a:t>гиперпараметрам</a:t>
+            </a:r>
+            <a:r>
+              <a:rPr lang="ru-RU" b="0" i="0" dirty="0">
+                <a:effectLst/>
+                <a:latin typeface="pplxSerif"/>
+              </a:rPr>
+              <a:t>: </a:t>
+            </a:r>
+          </a:p>
+          <a:p>
+            <a:pPr marL="457200" lvl="1" indent="0">
+              <a:buNone/>
+            </a:pPr>
+            <a:r>
+              <a:rPr lang="sv-SE" b="0" dirty="0">
+                <a:latin typeface="Cambria Math" panose="02040503050406030204" pitchFamily="18" charset="0"/>
+                <a:ea typeface="Cambria Math" panose="02040503050406030204" pitchFamily="18" charset="0"/>
+              </a:rPr>
+              <a:t>grid_svm &lt;- expand.grid(</a:t>
+            </a:r>
+          </a:p>
+          <a:p>
+            <a:pPr marL="457200" lvl="1" indent="0">
+              <a:buNone/>
+            </a:pPr>
+            <a:r>
+              <a:rPr lang="sv-SE" b="0" dirty="0">
+                <a:latin typeface="Cambria Math" panose="02040503050406030204" pitchFamily="18" charset="0"/>
+                <a:ea typeface="Cambria Math" panose="02040503050406030204" pitchFamily="18" charset="0"/>
+              </a:rPr>
+              <a:t>  C     = c(0.25, 1, 4),</a:t>
+            </a:r>
+          </a:p>
+          <a:p>
+            <a:pPr marL="457200" lvl="1" indent="0">
+              <a:buNone/>
+            </a:pPr>
+            <a:r>
+              <a:rPr lang="sv-SE" b="0" dirty="0">
+                <a:latin typeface="Cambria Math" panose="02040503050406030204" pitchFamily="18" charset="0"/>
+                <a:ea typeface="Cambria Math" panose="02040503050406030204" pitchFamily="18" charset="0"/>
+              </a:rPr>
+              <a:t>  sigma = c(0.01, 0.05, 0.1)</a:t>
+            </a:r>
+          </a:p>
+          <a:p>
+            <a:pPr marL="457200" lvl="1" indent="0">
+              <a:buNone/>
+            </a:pPr>
+            <a:r>
+              <a:rPr lang="sv-SE" b="0" dirty="0">
+                <a:latin typeface="Cambria Math" panose="02040503050406030204" pitchFamily="18" charset="0"/>
+                <a:ea typeface="Cambria Math" panose="02040503050406030204" pitchFamily="18" charset="0"/>
+              </a:rPr>
+              <a:t>)</a:t>
+            </a:r>
+            <a:endParaRPr lang="ru-RU" b="0" dirty="0">
+              <a:latin typeface="Cambria Math" panose="02040503050406030204" pitchFamily="18" charset="0"/>
+              <a:ea typeface="Cambria Math" panose="02040503050406030204" pitchFamily="18" charset="0"/>
+            </a:endParaRPr>
+          </a:p>
+          <a:p>
+            <a:pPr algn="l">
+              <a:buFont typeface="Arial" panose="020B0604020202020204" pitchFamily="34" charset="0"/>
+              <a:buChar char="•"/>
+            </a:pPr>
+            <a:r>
+              <a:rPr lang="ru-RU" i="0" dirty="0">
+                <a:effectLst/>
+              </a:rPr>
+              <a:t>Тот же </a:t>
+            </a:r>
+            <a:r>
+              <a:rPr lang="ru-RU" i="0" dirty="0" err="1">
+                <a:effectLst/>
+              </a:rPr>
+              <a:t>trainControl</a:t>
+            </a:r>
+            <a:r>
+              <a:rPr lang="ru-RU" i="0" dirty="0">
+                <a:effectLst/>
+              </a:rPr>
+              <a:t> (5‑fold CV, метрика ROC), что и для </a:t>
+            </a:r>
+            <a:r>
+              <a:rPr lang="ru-RU" i="0" dirty="0" err="1">
+                <a:effectLst/>
+              </a:rPr>
+              <a:t>Random</a:t>
+            </a:r>
+            <a:r>
+              <a:rPr lang="ru-RU" i="0" dirty="0">
+                <a:effectLst/>
+              </a:rPr>
+              <a:t> </a:t>
+            </a:r>
+            <a:r>
+              <a:rPr lang="ru-RU" i="0" dirty="0" err="1">
+                <a:effectLst/>
+              </a:rPr>
+              <a:t>Forest</a:t>
+            </a:r>
+            <a:r>
+              <a:rPr lang="ru-RU" i="0" dirty="0">
+                <a:effectLst/>
+              </a:rPr>
+              <a:t>.</a:t>
+            </a:r>
+          </a:p>
+          <a:p>
+            <a:pPr algn="l">
+              <a:buFont typeface="Arial" panose="020B0604020202020204" pitchFamily="34" charset="0"/>
+              <a:buChar char="•"/>
+            </a:pPr>
+            <a:r>
+              <a:rPr lang="ru-RU" i="0" dirty="0">
+                <a:effectLst/>
+              </a:rPr>
+              <a:t>Итог: 9 комбинаций параметров, для каждой считаем средний AUC, выбираем лучшую.</a:t>
+            </a:r>
+            <a:endParaRPr lang="en-US" i="0" dirty="0">
+              <a:effectLst/>
+            </a:endParaRPr>
+          </a:p>
+        </p:txBody>
+      </p:sp>
+    </p:spTree>
+    <p:extLst>
+      <p:ext uri="{BB962C8B-B14F-4D97-AF65-F5344CB8AC3E}">
+        <p14:creationId xmlns:p14="http://schemas.microsoft.com/office/powerpoint/2010/main" val="2522031318"/>
+      </p:ext>
+    </p:extLst>
+  </p:cSld>
+  <p:clrMapOvr>
+    <a:masterClrMapping/>
+  </p:clrMapOvr>
+</p:sld>
+</file>
+
+<file path=ppt/slides/slide22.xml><?xml version="1.0" encoding="utf-8"?>
+<p:sld xmlns:a="http://schemas.openxmlformats.org/drawingml/2006/main" xmlns:r="http://schemas.openxmlformats.org/officeDocument/2006/relationships" xmlns:p="http://schemas.openxmlformats.org/presentationml/2006/main">
+  <p:cSld>
+    <p:spTree>
+      <p:nvGrpSpPr>
+        <p:cNvPr id="1" name=""/>
+        <p:cNvGrpSpPr/>
+        <p:nvPr/>
+      </p:nvGrpSpPr>
+      <p:grpSpPr>
+        <a:xfrm>
+          <a:off x="0" y="0"/>
+          <a:ext cx="0" cy="0"/>
+          <a:chOff x="0" y="0"/>
+          <a:chExt cx="0" cy="0"/>
+        </a:xfrm>
+      </p:grpSpPr>
+      <p:sp>
+        <p:nvSpPr>
+          <p:cNvPr id="13" name="Номер слайда 12"/>
+          <p:cNvSpPr>
+            <a:spLocks noGrp="1"/>
+          </p:cNvSpPr>
+          <p:nvPr>
+            <p:ph type="sldNum" sz="quarter" idx="12"/>
+          </p:nvPr>
+        </p:nvSpPr>
+        <p:spPr>
+          <a:xfrm>
+            <a:off x="9274478" y="6356350"/>
+            <a:ext cx="2743200" cy="365125"/>
+          </a:xfrm>
+        </p:spPr>
+        <p:txBody>
+          <a:bodyPr/>
+          <a:lstStyle/>
+          <a:p>
+            <a:fld id="{B19B0651-EE4F-4900-A07F-96A6BFA9D0F0}" type="slidenum">
+              <a:rPr lang="ru-RU" smtClean="0">
+                <a:latin typeface="PT Sans" panose="020B0503020203020204" pitchFamily="34" charset="0"/>
+              </a:rPr>
+              <a:pPr/>
+              <a:t>22</a:t>
+            </a:fld>
+            <a:endParaRPr lang="ru-RU" dirty="0">
+              <a:latin typeface="PT Sans" panose="020B0503020203020204" pitchFamily="34" charset="0"/>
+            </a:endParaRPr>
+          </a:p>
+        </p:txBody>
+      </p:sp>
+      <p:grpSp>
+        <p:nvGrpSpPr>
+          <p:cNvPr id="9" name="Группа 8">
+            <a:extLst>
+              <a:ext uri="{FF2B5EF4-FFF2-40B4-BE49-F238E27FC236}">
+                <a16:creationId xmlns:a16="http://schemas.microsoft.com/office/drawing/2014/main" id="{D7342440-FCEE-2E4F-950F-6FE7857B3EB5}"/>
+              </a:ext>
+            </a:extLst>
+          </p:cNvPr>
+          <p:cNvGrpSpPr/>
+          <p:nvPr/>
+        </p:nvGrpSpPr>
+        <p:grpSpPr>
+          <a:xfrm>
+            <a:off x="0" y="-4966"/>
+            <a:ext cx="12192000" cy="1035565"/>
+            <a:chOff x="0" y="1924"/>
+            <a:chExt cx="9144000" cy="832664"/>
+          </a:xfrm>
+        </p:grpSpPr>
+        <p:sp>
+          <p:nvSpPr>
+            <p:cNvPr id="10" name="Google Shape;133;p5">
+              <a:extLst>
+                <a:ext uri="{FF2B5EF4-FFF2-40B4-BE49-F238E27FC236}">
+                  <a16:creationId xmlns:a16="http://schemas.microsoft.com/office/drawing/2014/main" id="{E1FF157E-1AAE-A345-AC22-C4FE991023F3}"/>
+                </a:ext>
+              </a:extLst>
+            </p:cNvPr>
+            <p:cNvSpPr/>
+            <p:nvPr/>
+          </p:nvSpPr>
+          <p:spPr>
+            <a:xfrm>
+              <a:off x="0" y="1924"/>
+              <a:ext cx="9144000" cy="832664"/>
+            </a:xfrm>
+            <a:prstGeom prst="rect">
+              <a:avLst/>
+            </a:prstGeom>
+            <a:gradFill>
+              <a:gsLst>
+                <a:gs pos="0">
+                  <a:srgbClr val="003061"/>
+                </a:gs>
+                <a:gs pos="50000">
+                  <a:srgbClr val="00468D"/>
+                </a:gs>
+                <a:gs pos="100000">
+                  <a:srgbClr val="0054AA"/>
+                </a:gs>
+              </a:gsLst>
+              <a:lin ang="5400000" scaled="0"/>
+            </a:gradFill>
+            <a:ln>
+              <a:noFill/>
+            </a:ln>
+          </p:spPr>
+          <p:txBody>
+            <a:bodyPr spcFirstLastPara="1" wrap="square" lIns="91425" tIns="45700" rIns="91425" bIns="45700" anchor="ctr" anchorCtr="0">
+              <a:noAutofit/>
+            </a:bodyPr>
+            <a:lstStyle/>
+            <a:p>
+              <a:pPr marL="0" marR="0" lvl="0" indent="0" algn="ctr" rtl="0">
+                <a:spcBef>
+                  <a:spcPts val="0"/>
+                </a:spcBef>
+                <a:spcAft>
+                  <a:spcPts val="0"/>
+                </a:spcAft>
+                <a:buNone/>
+              </a:pPr>
+              <a:endParaRPr sz="1800" dirty="0">
+                <a:solidFill>
+                  <a:schemeClr val="lt1"/>
+                </a:solidFill>
+                <a:latin typeface="PT Sans" panose="020B0503020203020204" pitchFamily="34" charset="0"/>
+                <a:ea typeface="Calibri"/>
+                <a:cs typeface="Calibri"/>
+                <a:sym typeface="Calibri"/>
+              </a:endParaRPr>
+            </a:p>
+          </p:txBody>
+        </p:sp>
+        <p:pic>
+          <p:nvPicPr>
+            <p:cNvPr id="11" name="Google Shape;134;p5" descr="C:\Users\MSShafigullin\Desktop\2020\Презентация КФУ\kfu_logo_circle_rus.png">
+              <a:extLst>
+                <a:ext uri="{FF2B5EF4-FFF2-40B4-BE49-F238E27FC236}">
+                  <a16:creationId xmlns:a16="http://schemas.microsoft.com/office/drawing/2014/main" id="{25CDED6D-DB62-6B41-9BFC-DFBDD55047A7}"/>
+                </a:ext>
+              </a:extLst>
+            </p:cNvPr>
+            <p:cNvPicPr preferRelativeResize="0"/>
+            <p:nvPr/>
+          </p:nvPicPr>
+          <p:blipFill rotWithShape="1">
+            <a:blip r:embed="rId3">
+              <a:alphaModFix/>
+            </a:blip>
+            <a:srcRect/>
+            <a:stretch/>
+          </p:blipFill>
+          <p:spPr>
+            <a:xfrm>
+              <a:off x="137267" y="148256"/>
+              <a:ext cx="553050" cy="540000"/>
+            </a:xfrm>
+            <a:prstGeom prst="rect">
+              <a:avLst/>
+            </a:prstGeom>
+            <a:noFill/>
+            <a:ln>
+              <a:noFill/>
+            </a:ln>
+          </p:spPr>
+        </p:pic>
+        <p:sp>
+          <p:nvSpPr>
+            <p:cNvPr id="12" name="Google Shape;135;p5">
+              <a:extLst>
+                <a:ext uri="{FF2B5EF4-FFF2-40B4-BE49-F238E27FC236}">
+                  <a16:creationId xmlns:a16="http://schemas.microsoft.com/office/drawing/2014/main" id="{B90A0E07-9A35-E74D-859C-8109875E2889}"/>
+                </a:ext>
+              </a:extLst>
+            </p:cNvPr>
+            <p:cNvSpPr txBox="1"/>
+            <p:nvPr/>
+          </p:nvSpPr>
+          <p:spPr>
+            <a:xfrm>
+              <a:off x="835887" y="240719"/>
+              <a:ext cx="7344900" cy="321682"/>
+            </a:xfrm>
+            <a:prstGeom prst="rect">
+              <a:avLst/>
+            </a:prstGeom>
+            <a:noFill/>
+            <a:ln>
+              <a:noFill/>
+            </a:ln>
+          </p:spPr>
+          <p:txBody>
+            <a:bodyPr spcFirstLastPara="1" wrap="square" lIns="91425" tIns="45700" rIns="91425" bIns="45700" anchor="t" anchorCtr="0">
+              <a:spAutoFit/>
+            </a:bodyPr>
+            <a:lstStyle/>
+            <a:p>
+              <a:pPr lvl="0"/>
+              <a:r>
+                <a:rPr lang="en-US" sz="2000" dirty="0">
+                  <a:solidFill>
+                    <a:schemeClr val="lt1"/>
+                  </a:solidFill>
+                  <a:latin typeface="PT Sans" panose="020B0503020203020204" pitchFamily="34" charset="0"/>
+                  <a:ea typeface="PT Sans"/>
+                  <a:cs typeface="PT Sans"/>
+                  <a:sym typeface="PT Sans"/>
+                </a:rPr>
+                <a:t>RF vs SVM: </a:t>
+              </a:r>
+              <a:r>
+                <a:rPr lang="ru-RU" sz="2000" dirty="0">
+                  <a:solidFill>
+                    <a:schemeClr val="lt1"/>
+                  </a:solidFill>
+                  <a:latin typeface="PT Sans" panose="020B0503020203020204" pitchFamily="34" charset="0"/>
+                  <a:ea typeface="PT Sans"/>
+                  <a:cs typeface="PT Sans"/>
+                  <a:sym typeface="PT Sans"/>
+                </a:rPr>
+                <a:t>сравнение</a:t>
+              </a:r>
+            </a:p>
+          </p:txBody>
+        </p:sp>
+        <p:pic>
+          <p:nvPicPr>
+            <p:cNvPr id="14" name="Google Shape;136;p5" descr="C:\Users\MSShafigullin\Desktop\Проекты\Презентация по ДК\qs.jpg">
+              <a:extLst>
+                <a:ext uri="{FF2B5EF4-FFF2-40B4-BE49-F238E27FC236}">
+                  <a16:creationId xmlns:a16="http://schemas.microsoft.com/office/drawing/2014/main" id="{9F8DFA2B-AC78-464C-BC1D-62929B6D8A97}"/>
+                </a:ext>
+              </a:extLst>
+            </p:cNvPr>
+            <p:cNvPicPr preferRelativeResize="0"/>
+            <p:nvPr/>
+          </p:nvPicPr>
+          <p:blipFill rotWithShape="1">
+            <a:blip r:embed="rId4">
+              <a:alphaModFix/>
+            </a:blip>
+            <a:srcRect/>
+            <a:stretch/>
+          </p:blipFill>
+          <p:spPr>
+            <a:xfrm>
+              <a:off x="7878094" y="367563"/>
+              <a:ext cx="353386" cy="353386"/>
+            </a:xfrm>
+            <a:prstGeom prst="rect">
+              <a:avLst/>
+            </a:prstGeom>
+            <a:noFill/>
+            <a:ln>
+              <a:noFill/>
+            </a:ln>
+          </p:spPr>
+        </p:pic>
+        <p:pic>
+          <p:nvPicPr>
+            <p:cNvPr id="15" name="Google Shape;137;p5" descr="C:\Users\MSShafigullin\Desktop\2020\Презентация КФУ\THE.png">
+              <a:extLst>
+                <a:ext uri="{FF2B5EF4-FFF2-40B4-BE49-F238E27FC236}">
+                  <a16:creationId xmlns:a16="http://schemas.microsoft.com/office/drawing/2014/main" id="{835D2624-2EF8-2144-9816-A09872F47777}"/>
+                </a:ext>
+              </a:extLst>
+            </p:cNvPr>
+            <p:cNvPicPr preferRelativeResize="0"/>
+            <p:nvPr/>
+          </p:nvPicPr>
+          <p:blipFill rotWithShape="1">
+            <a:blip r:embed="rId5">
+              <a:alphaModFix/>
+            </a:blip>
+            <a:srcRect/>
+            <a:stretch/>
+          </p:blipFill>
+          <p:spPr>
+            <a:xfrm>
+              <a:off x="7928787" y="114719"/>
+              <a:ext cx="252000" cy="252000"/>
+            </a:xfrm>
+            <a:prstGeom prst="rect">
+              <a:avLst/>
+            </a:prstGeom>
+            <a:noFill/>
+            <a:ln>
+              <a:noFill/>
+            </a:ln>
+          </p:spPr>
+        </p:pic>
+        <p:sp>
+          <p:nvSpPr>
+            <p:cNvPr id="16" name="Google Shape;138;p5">
+              <a:extLst>
+                <a:ext uri="{FF2B5EF4-FFF2-40B4-BE49-F238E27FC236}">
+                  <a16:creationId xmlns:a16="http://schemas.microsoft.com/office/drawing/2014/main" id="{841F1A31-5CCC-E941-956A-F47E7E67D768}"/>
+                </a:ext>
+              </a:extLst>
+            </p:cNvPr>
+            <p:cNvSpPr txBox="1"/>
+            <p:nvPr/>
+          </p:nvSpPr>
+          <p:spPr>
+            <a:xfrm>
+              <a:off x="8279432" y="374979"/>
+              <a:ext cx="659482" cy="272188"/>
+            </a:xfrm>
+            <a:prstGeom prst="rect">
+              <a:avLst/>
+            </a:prstGeom>
+            <a:noFill/>
+            <a:ln>
+              <a:noFill/>
+            </a:ln>
+          </p:spPr>
+          <p:txBody>
+            <a:bodyPr spcFirstLastPara="1" wrap="square" lIns="91425" tIns="45700" rIns="91425" bIns="45700" anchor="t" anchorCtr="0">
+              <a:spAutoFit/>
+            </a:bodyPr>
+            <a:lstStyle/>
+            <a:p>
+              <a:pPr marL="0" marR="0" lvl="0" indent="0" algn="l" rtl="0">
+                <a:lnSpc>
+                  <a:spcPct val="100000"/>
+                </a:lnSpc>
+                <a:spcBef>
+                  <a:spcPts val="0"/>
+                </a:spcBef>
+                <a:spcAft>
+                  <a:spcPts val="0"/>
+                </a:spcAft>
+                <a:buClr>
+                  <a:schemeClr val="lt1"/>
+                </a:buClr>
+                <a:buSzPts val="800"/>
+                <a:buFont typeface="PT Sans"/>
+                <a:buNone/>
+              </a:pPr>
+              <a:r>
+                <a:rPr lang="ru-RU" sz="800" b="0">
+                  <a:solidFill>
+                    <a:schemeClr val="lt1"/>
+                  </a:solidFill>
+                  <a:latin typeface="PT Sans" panose="020B0503020203020204" pitchFamily="34" charset="0"/>
+                  <a:ea typeface="PT Sans"/>
+                  <a:cs typeface="PT Sans"/>
+                  <a:sym typeface="PT Sans"/>
+                </a:rPr>
+                <a:t>370</a:t>
+              </a:r>
+              <a:endParaRPr>
+                <a:latin typeface="PT Sans" panose="020B0503020203020204" pitchFamily="34" charset="0"/>
+              </a:endParaRPr>
+            </a:p>
+            <a:p>
+              <a:pPr marL="0" marR="0" lvl="0" indent="0" algn="l" rtl="0">
+                <a:lnSpc>
+                  <a:spcPct val="100000"/>
+                </a:lnSpc>
+                <a:spcBef>
+                  <a:spcPts val="0"/>
+                </a:spcBef>
+                <a:spcAft>
+                  <a:spcPts val="0"/>
+                </a:spcAft>
+                <a:buClr>
+                  <a:schemeClr val="lt1"/>
+                </a:buClr>
+                <a:buSzPts val="800"/>
+                <a:buFont typeface="PT Sans"/>
+                <a:buNone/>
+              </a:pPr>
+              <a:r>
+                <a:rPr lang="ru-RU" sz="800" b="0" u="none" strike="noStrike" cap="none">
+                  <a:solidFill>
+                    <a:schemeClr val="lt1"/>
+                  </a:solidFill>
+                  <a:latin typeface="PT Sans" panose="020B0503020203020204" pitchFamily="34" charset="0"/>
+                  <a:ea typeface="PT Sans"/>
+                  <a:cs typeface="PT Sans"/>
+                  <a:sym typeface="PT Sans"/>
+                </a:rPr>
+                <a:t>13</a:t>
+              </a:r>
+              <a:endParaRPr sz="800" b="0" u="none" strike="noStrike" cap="none">
+                <a:solidFill>
+                  <a:schemeClr val="lt1"/>
+                </a:solidFill>
+                <a:latin typeface="PT Sans" panose="020B0503020203020204" pitchFamily="34" charset="0"/>
+                <a:ea typeface="PT Sans"/>
+                <a:cs typeface="PT Sans"/>
+                <a:sym typeface="PT Sans"/>
+              </a:endParaRPr>
+            </a:p>
+          </p:txBody>
+        </p:sp>
+        <p:sp>
+          <p:nvSpPr>
+            <p:cNvPr id="17" name="Google Shape;139;p5">
+              <a:extLst>
+                <a:ext uri="{FF2B5EF4-FFF2-40B4-BE49-F238E27FC236}">
+                  <a16:creationId xmlns:a16="http://schemas.microsoft.com/office/drawing/2014/main" id="{A28DBFF6-9F47-6244-B20A-895959377BC2}"/>
+                </a:ext>
+              </a:extLst>
+            </p:cNvPr>
+            <p:cNvSpPr txBox="1"/>
+            <p:nvPr/>
+          </p:nvSpPr>
+          <p:spPr>
+            <a:xfrm>
+              <a:off x="8279432" y="71442"/>
+              <a:ext cx="659482" cy="272188"/>
+            </a:xfrm>
+            <a:prstGeom prst="rect">
+              <a:avLst/>
+            </a:prstGeom>
+            <a:noFill/>
+            <a:ln>
+              <a:noFill/>
+            </a:ln>
+          </p:spPr>
+          <p:txBody>
+            <a:bodyPr spcFirstLastPara="1" wrap="square" lIns="91425" tIns="45700" rIns="91425" bIns="45700" anchor="t" anchorCtr="0">
+              <a:spAutoFit/>
+            </a:bodyPr>
+            <a:lstStyle/>
+            <a:p>
+              <a:pPr marL="0" marR="0" lvl="0" indent="0" algn="l" rtl="0">
+                <a:lnSpc>
+                  <a:spcPct val="100000"/>
+                </a:lnSpc>
+                <a:spcBef>
+                  <a:spcPts val="0"/>
+                </a:spcBef>
+                <a:spcAft>
+                  <a:spcPts val="0"/>
+                </a:spcAft>
+                <a:buClr>
+                  <a:schemeClr val="lt1"/>
+                </a:buClr>
+                <a:buSzPts val="800"/>
+                <a:buFont typeface="PT Sans"/>
+                <a:buNone/>
+              </a:pPr>
+              <a:r>
+                <a:rPr lang="ru-RU" sz="800" b="0">
+                  <a:solidFill>
+                    <a:schemeClr val="lt1"/>
+                  </a:solidFill>
+                  <a:latin typeface="PT Sans" panose="020B0503020203020204" pitchFamily="34" charset="0"/>
+                  <a:ea typeface="PT Sans"/>
+                  <a:cs typeface="PT Sans"/>
+                  <a:sym typeface="PT Sans"/>
+                </a:rPr>
+                <a:t>601-800</a:t>
+              </a:r>
+              <a:endParaRPr>
+                <a:latin typeface="PT Sans" panose="020B0503020203020204" pitchFamily="34" charset="0"/>
+              </a:endParaRPr>
+            </a:p>
+            <a:p>
+              <a:pPr marL="0" marR="0" lvl="0" indent="0" algn="l" rtl="0">
+                <a:lnSpc>
+                  <a:spcPct val="100000"/>
+                </a:lnSpc>
+                <a:spcBef>
+                  <a:spcPts val="0"/>
+                </a:spcBef>
+                <a:spcAft>
+                  <a:spcPts val="0"/>
+                </a:spcAft>
+                <a:buClr>
+                  <a:schemeClr val="lt1"/>
+                </a:buClr>
+                <a:buSzPts val="800"/>
+                <a:buFont typeface="PT Sans"/>
+                <a:buNone/>
+              </a:pPr>
+              <a:r>
+                <a:rPr lang="ru-RU" sz="800" b="0" u="none" strike="noStrike" cap="none">
+                  <a:solidFill>
+                    <a:schemeClr val="lt1"/>
+                  </a:solidFill>
+                  <a:latin typeface="PT Sans" panose="020B0503020203020204" pitchFamily="34" charset="0"/>
+                  <a:ea typeface="PT Sans"/>
+                  <a:cs typeface="PT Sans"/>
+                  <a:sym typeface="PT Sans"/>
+                </a:rPr>
+                <a:t>9</a:t>
+              </a:r>
+              <a:endParaRPr sz="800" b="0" u="none" strike="noStrike" cap="none">
+                <a:solidFill>
+                  <a:schemeClr val="lt1"/>
+                </a:solidFill>
+                <a:latin typeface="PT Sans" panose="020B0503020203020204" pitchFamily="34" charset="0"/>
+                <a:ea typeface="PT Sans"/>
+                <a:cs typeface="PT Sans"/>
+                <a:sym typeface="PT Sans"/>
+              </a:endParaRPr>
+            </a:p>
+          </p:txBody>
+        </p:sp>
+      </p:grpSp>
+      <p:sp>
+        <p:nvSpPr>
+          <p:cNvPr id="19" name="Объект 2">
+            <a:extLst>
+              <a:ext uri="{FF2B5EF4-FFF2-40B4-BE49-F238E27FC236}">
+                <a16:creationId xmlns:a16="http://schemas.microsoft.com/office/drawing/2014/main" id="{30C61546-9215-4D0C-81CB-5EE3A5637E25}"/>
+              </a:ext>
+            </a:extLst>
+          </p:cNvPr>
+          <p:cNvSpPr>
+            <a:spLocks noGrp="1"/>
+          </p:cNvSpPr>
+          <p:nvPr>
+            <p:ph idx="1"/>
+          </p:nvPr>
+        </p:nvSpPr>
+        <p:spPr>
+          <a:xfrm>
+            <a:off x="174322" y="1180353"/>
+            <a:ext cx="11423283" cy="5677647"/>
+          </a:xfrm>
+        </p:spPr>
+        <p:txBody>
+          <a:bodyPr>
+            <a:normAutofit/>
+          </a:bodyPr>
+          <a:lstStyle/>
+          <a:p>
+            <a:pPr algn="l">
+              <a:buFont typeface="Arial" panose="020B0604020202020204" pitchFamily="34" charset="0"/>
+              <a:buChar char="•"/>
+            </a:pPr>
+            <a:r>
+              <a:rPr lang="ru-RU" sz="3600" i="0" dirty="0">
+                <a:effectLst/>
+              </a:rPr>
+              <a:t>Для лучшей модели </a:t>
+            </a:r>
+            <a:r>
+              <a:rPr lang="en-US" sz="3600" i="0" dirty="0">
+                <a:effectLst/>
+              </a:rPr>
+              <a:t>SVM (best C, sigma) </a:t>
+            </a:r>
+            <a:r>
+              <a:rPr lang="ru-RU" sz="3600" i="0" dirty="0">
+                <a:effectLst/>
+              </a:rPr>
+              <a:t>считаем на тесте:</a:t>
+            </a:r>
+          </a:p>
+          <a:p>
+            <a:pPr lvl="1"/>
+            <a:r>
+              <a:rPr lang="en-US" sz="3200" i="0" dirty="0">
+                <a:effectLst/>
+              </a:rPr>
+              <a:t>AUC‑ROC;</a:t>
+            </a:r>
+          </a:p>
+          <a:p>
+            <a:pPr lvl="1"/>
+            <a:r>
+              <a:rPr lang="en-US" sz="3200" i="0" dirty="0">
+                <a:effectLst/>
+              </a:rPr>
+              <a:t>F1‑score (</a:t>
+            </a:r>
+            <a:r>
+              <a:rPr lang="ru-RU" sz="3200" i="0" dirty="0">
+                <a:effectLst/>
+              </a:rPr>
+              <a:t>при пороге 0.5).</a:t>
+            </a:r>
+          </a:p>
+          <a:p>
+            <a:pPr algn="l">
+              <a:buFont typeface="Arial" panose="020B0604020202020204" pitchFamily="34" charset="0"/>
+              <a:buChar char="•"/>
+            </a:pPr>
+            <a:r>
+              <a:rPr lang="ru-RU" sz="3600" i="0" dirty="0">
+                <a:effectLst/>
+              </a:rPr>
+              <a:t>Сравниваем с лучшим </a:t>
+            </a:r>
+            <a:r>
+              <a:rPr lang="en-US" sz="3600" i="0" dirty="0">
+                <a:effectLst/>
+              </a:rPr>
+              <a:t>Random Forest (best </a:t>
+            </a:r>
+            <a:r>
+              <a:rPr lang="en-US" sz="3600" i="0" dirty="0" err="1">
+                <a:effectLst/>
+              </a:rPr>
+              <a:t>mtry</a:t>
+            </a:r>
+            <a:r>
+              <a:rPr lang="en-US" sz="3600" i="0" dirty="0">
+                <a:effectLst/>
+              </a:rPr>
+              <a:t>): </a:t>
+            </a:r>
+            <a:r>
+              <a:rPr lang="ru-RU" sz="3600" i="0" dirty="0">
+                <a:effectLst/>
+              </a:rPr>
+              <a:t>таблица </a:t>
+            </a:r>
+            <a:r>
+              <a:rPr lang="en-US" sz="3600" i="0" dirty="0">
+                <a:effectLst/>
+              </a:rPr>
+              <a:t>model × AUC × F1</a:t>
+            </a:r>
+          </a:p>
+        </p:txBody>
+      </p:sp>
+    </p:spTree>
+    <p:extLst>
+      <p:ext uri="{BB962C8B-B14F-4D97-AF65-F5344CB8AC3E}">
+        <p14:creationId xmlns:p14="http://schemas.microsoft.com/office/powerpoint/2010/main" val="946057226"/>
+      </p:ext>
+    </p:extLst>
+  </p:cSld>
+  <p:clrMapOvr>
+    <a:masterClrMapping/>
+  </p:clrMapOvr>
+</p:sld>
+</file>
+
+<file path=ppt/slides/slide23.xml><?xml version="1.0" encoding="utf-8"?>
+<p:sld xmlns:a="http://schemas.openxmlformats.org/drawingml/2006/main" xmlns:r="http://schemas.openxmlformats.org/officeDocument/2006/relationships" xmlns:p="http://schemas.openxmlformats.org/presentationml/2006/main">
+  <p:cSld>
+    <p:spTree>
+      <p:nvGrpSpPr>
+        <p:cNvPr id="1" name=""/>
+        <p:cNvGrpSpPr/>
+        <p:nvPr/>
+      </p:nvGrpSpPr>
+      <p:grpSpPr>
+        <a:xfrm>
+          <a:off x="0" y="0"/>
+          <a:ext cx="0" cy="0"/>
+          <a:chOff x="0" y="0"/>
+          <a:chExt cx="0" cy="0"/>
+        </a:xfrm>
+      </p:grpSpPr>
+      <p:sp>
+        <p:nvSpPr>
+          <p:cNvPr id="13" name="Номер слайда 12"/>
+          <p:cNvSpPr>
+            <a:spLocks noGrp="1"/>
+          </p:cNvSpPr>
+          <p:nvPr>
+            <p:ph type="sldNum" sz="quarter" idx="12"/>
+          </p:nvPr>
+        </p:nvSpPr>
+        <p:spPr>
+          <a:xfrm>
+            <a:off x="9274478" y="6356350"/>
+            <a:ext cx="2743200" cy="365125"/>
+          </a:xfrm>
+        </p:spPr>
+        <p:txBody>
+          <a:bodyPr/>
+          <a:lstStyle/>
+          <a:p>
+            <a:fld id="{B19B0651-EE4F-4900-A07F-96A6BFA9D0F0}" type="slidenum">
+              <a:rPr lang="ru-RU" smtClean="0">
+                <a:latin typeface="PT Sans" panose="020B0503020203020204" pitchFamily="34" charset="0"/>
+              </a:rPr>
+              <a:pPr/>
+              <a:t>23</a:t>
+            </a:fld>
+            <a:endParaRPr lang="ru-RU" dirty="0">
+              <a:latin typeface="PT Sans" panose="020B0503020203020204" pitchFamily="34" charset="0"/>
+            </a:endParaRPr>
+          </a:p>
+        </p:txBody>
+      </p:sp>
+      <p:grpSp>
+        <p:nvGrpSpPr>
+          <p:cNvPr id="9" name="Группа 8">
+            <a:extLst>
+              <a:ext uri="{FF2B5EF4-FFF2-40B4-BE49-F238E27FC236}">
+                <a16:creationId xmlns:a16="http://schemas.microsoft.com/office/drawing/2014/main" id="{D7342440-FCEE-2E4F-950F-6FE7857B3EB5}"/>
+              </a:ext>
+            </a:extLst>
+          </p:cNvPr>
+          <p:cNvGrpSpPr/>
+          <p:nvPr/>
+        </p:nvGrpSpPr>
+        <p:grpSpPr>
+          <a:xfrm>
+            <a:off x="0" y="-4966"/>
+            <a:ext cx="12192000" cy="1035565"/>
+            <a:chOff x="0" y="1924"/>
+            <a:chExt cx="9144000" cy="832664"/>
+          </a:xfrm>
+        </p:grpSpPr>
+        <p:sp>
+          <p:nvSpPr>
+            <p:cNvPr id="10" name="Google Shape;133;p5">
+              <a:extLst>
+                <a:ext uri="{FF2B5EF4-FFF2-40B4-BE49-F238E27FC236}">
+                  <a16:creationId xmlns:a16="http://schemas.microsoft.com/office/drawing/2014/main" id="{E1FF157E-1AAE-A345-AC22-C4FE991023F3}"/>
+                </a:ext>
+              </a:extLst>
+            </p:cNvPr>
+            <p:cNvSpPr/>
+            <p:nvPr/>
+          </p:nvSpPr>
+          <p:spPr>
+            <a:xfrm>
+              <a:off x="0" y="1924"/>
+              <a:ext cx="9144000" cy="832664"/>
+            </a:xfrm>
+            <a:prstGeom prst="rect">
+              <a:avLst/>
+            </a:prstGeom>
+            <a:gradFill>
+              <a:gsLst>
+                <a:gs pos="0">
+                  <a:srgbClr val="003061"/>
+                </a:gs>
+                <a:gs pos="50000">
+                  <a:srgbClr val="00468D"/>
+                </a:gs>
+                <a:gs pos="100000">
+                  <a:srgbClr val="0054AA"/>
+                </a:gs>
+              </a:gsLst>
+              <a:lin ang="5400000" scaled="0"/>
+            </a:gradFill>
+            <a:ln>
+              <a:noFill/>
+            </a:ln>
+          </p:spPr>
+          <p:txBody>
+            <a:bodyPr spcFirstLastPara="1" wrap="square" lIns="91425" tIns="45700" rIns="91425" bIns="45700" anchor="ctr" anchorCtr="0">
+              <a:noAutofit/>
+            </a:bodyPr>
+            <a:lstStyle/>
+            <a:p>
+              <a:pPr marL="0" marR="0" lvl="0" indent="0" algn="ctr" rtl="0">
+                <a:spcBef>
+                  <a:spcPts val="0"/>
+                </a:spcBef>
+                <a:spcAft>
+                  <a:spcPts val="0"/>
+                </a:spcAft>
+                <a:buNone/>
+              </a:pPr>
+              <a:endParaRPr sz="1800" dirty="0">
+                <a:solidFill>
+                  <a:schemeClr val="lt1"/>
+                </a:solidFill>
+                <a:latin typeface="PT Sans" panose="020B0503020203020204" pitchFamily="34" charset="0"/>
+                <a:ea typeface="Calibri"/>
+                <a:cs typeface="Calibri"/>
+                <a:sym typeface="Calibri"/>
+              </a:endParaRPr>
+            </a:p>
+          </p:txBody>
+        </p:sp>
+        <p:pic>
+          <p:nvPicPr>
+            <p:cNvPr id="11" name="Google Shape;134;p5" descr="C:\Users\MSShafigullin\Desktop\2020\Презентация КФУ\kfu_logo_circle_rus.png">
+              <a:extLst>
+                <a:ext uri="{FF2B5EF4-FFF2-40B4-BE49-F238E27FC236}">
+                  <a16:creationId xmlns:a16="http://schemas.microsoft.com/office/drawing/2014/main" id="{25CDED6D-DB62-6B41-9BFC-DFBDD55047A7}"/>
+                </a:ext>
+              </a:extLst>
+            </p:cNvPr>
+            <p:cNvPicPr preferRelativeResize="0"/>
+            <p:nvPr/>
+          </p:nvPicPr>
+          <p:blipFill rotWithShape="1">
+            <a:blip r:embed="rId3">
+              <a:alphaModFix/>
+            </a:blip>
+            <a:srcRect/>
+            <a:stretch/>
+          </p:blipFill>
+          <p:spPr>
+            <a:xfrm>
+              <a:off x="137267" y="148256"/>
+              <a:ext cx="553050" cy="540000"/>
+            </a:xfrm>
+            <a:prstGeom prst="rect">
+              <a:avLst/>
+            </a:prstGeom>
+            <a:noFill/>
+            <a:ln>
+              <a:noFill/>
+            </a:ln>
+          </p:spPr>
+        </p:pic>
+        <p:sp>
+          <p:nvSpPr>
+            <p:cNvPr id="12" name="Google Shape;135;p5">
+              <a:extLst>
+                <a:ext uri="{FF2B5EF4-FFF2-40B4-BE49-F238E27FC236}">
+                  <a16:creationId xmlns:a16="http://schemas.microsoft.com/office/drawing/2014/main" id="{B90A0E07-9A35-E74D-859C-8109875E2889}"/>
+                </a:ext>
+              </a:extLst>
+            </p:cNvPr>
+            <p:cNvSpPr txBox="1"/>
+            <p:nvPr/>
+          </p:nvSpPr>
+          <p:spPr>
+            <a:xfrm>
+              <a:off x="835887" y="240719"/>
+              <a:ext cx="7344900" cy="321682"/>
+            </a:xfrm>
+            <a:prstGeom prst="rect">
+              <a:avLst/>
+            </a:prstGeom>
+            <a:noFill/>
+            <a:ln>
+              <a:noFill/>
+            </a:ln>
+          </p:spPr>
+          <p:txBody>
+            <a:bodyPr spcFirstLastPara="1" wrap="square" lIns="91425" tIns="45700" rIns="91425" bIns="45700" anchor="t" anchorCtr="0">
+              <a:spAutoFit/>
+            </a:bodyPr>
+            <a:lstStyle/>
+            <a:p>
+              <a:pPr lvl="0"/>
+              <a:r>
+                <a:rPr lang="ru-RU" sz="2000" dirty="0">
+                  <a:solidFill>
+                    <a:schemeClr val="lt1"/>
+                  </a:solidFill>
+                  <a:latin typeface="PT Sans" panose="020B0503020203020204" pitchFamily="34" charset="0"/>
+                  <a:ea typeface="PT Sans"/>
+                  <a:cs typeface="PT Sans"/>
+                  <a:sym typeface="PT Sans"/>
+                </a:rPr>
+                <a:t>Когда и как использовать Grid / </a:t>
+              </a:r>
+              <a:r>
+                <a:rPr lang="ru-RU" sz="2000" dirty="0" err="1">
+                  <a:solidFill>
+                    <a:schemeClr val="lt1"/>
+                  </a:solidFill>
+                  <a:latin typeface="PT Sans" panose="020B0503020203020204" pitchFamily="34" charset="0"/>
+                  <a:ea typeface="PT Sans"/>
+                  <a:cs typeface="PT Sans"/>
+                  <a:sym typeface="PT Sans"/>
+                </a:rPr>
+                <a:t>Random</a:t>
+              </a:r>
+              <a:r>
+                <a:rPr lang="ru-RU" sz="2000" dirty="0">
+                  <a:solidFill>
+                    <a:schemeClr val="lt1"/>
+                  </a:solidFill>
+                  <a:latin typeface="PT Sans" panose="020B0503020203020204" pitchFamily="34" charset="0"/>
+                  <a:ea typeface="PT Sans"/>
+                  <a:cs typeface="PT Sans"/>
+                  <a:sym typeface="PT Sans"/>
+                </a:rPr>
+                <a:t> Search в ML</a:t>
+              </a:r>
+            </a:p>
+          </p:txBody>
+        </p:sp>
+        <p:pic>
+          <p:nvPicPr>
+            <p:cNvPr id="14" name="Google Shape;136;p5" descr="C:\Users\MSShafigullin\Desktop\Проекты\Презентация по ДК\qs.jpg">
+              <a:extLst>
+                <a:ext uri="{FF2B5EF4-FFF2-40B4-BE49-F238E27FC236}">
+                  <a16:creationId xmlns:a16="http://schemas.microsoft.com/office/drawing/2014/main" id="{9F8DFA2B-AC78-464C-BC1D-62929B6D8A97}"/>
+                </a:ext>
+              </a:extLst>
+            </p:cNvPr>
+            <p:cNvPicPr preferRelativeResize="0"/>
+            <p:nvPr/>
+          </p:nvPicPr>
+          <p:blipFill rotWithShape="1">
+            <a:blip r:embed="rId4">
+              <a:alphaModFix/>
+            </a:blip>
+            <a:srcRect/>
+            <a:stretch/>
+          </p:blipFill>
+          <p:spPr>
+            <a:xfrm>
+              <a:off x="7878094" y="367563"/>
+              <a:ext cx="353386" cy="353386"/>
+            </a:xfrm>
+            <a:prstGeom prst="rect">
+              <a:avLst/>
+            </a:prstGeom>
+            <a:noFill/>
+            <a:ln>
+              <a:noFill/>
+            </a:ln>
+          </p:spPr>
+        </p:pic>
+        <p:pic>
+          <p:nvPicPr>
+            <p:cNvPr id="15" name="Google Shape;137;p5" descr="C:\Users\MSShafigullin\Desktop\2020\Презентация КФУ\THE.png">
+              <a:extLst>
+                <a:ext uri="{FF2B5EF4-FFF2-40B4-BE49-F238E27FC236}">
+                  <a16:creationId xmlns:a16="http://schemas.microsoft.com/office/drawing/2014/main" id="{835D2624-2EF8-2144-9816-A09872F47777}"/>
+                </a:ext>
+              </a:extLst>
+            </p:cNvPr>
+            <p:cNvPicPr preferRelativeResize="0"/>
+            <p:nvPr/>
+          </p:nvPicPr>
+          <p:blipFill rotWithShape="1">
+            <a:blip r:embed="rId5">
+              <a:alphaModFix/>
+            </a:blip>
+            <a:srcRect/>
+            <a:stretch/>
+          </p:blipFill>
+          <p:spPr>
+            <a:xfrm>
+              <a:off x="7928787" y="114719"/>
+              <a:ext cx="252000" cy="252000"/>
+            </a:xfrm>
+            <a:prstGeom prst="rect">
+              <a:avLst/>
+            </a:prstGeom>
+            <a:noFill/>
+            <a:ln>
+              <a:noFill/>
+            </a:ln>
+          </p:spPr>
+        </p:pic>
+        <p:sp>
+          <p:nvSpPr>
+            <p:cNvPr id="16" name="Google Shape;138;p5">
+              <a:extLst>
+                <a:ext uri="{FF2B5EF4-FFF2-40B4-BE49-F238E27FC236}">
+                  <a16:creationId xmlns:a16="http://schemas.microsoft.com/office/drawing/2014/main" id="{841F1A31-5CCC-E941-956A-F47E7E67D768}"/>
+                </a:ext>
+              </a:extLst>
+            </p:cNvPr>
+            <p:cNvSpPr txBox="1"/>
+            <p:nvPr/>
+          </p:nvSpPr>
+          <p:spPr>
+            <a:xfrm>
+              <a:off x="8279432" y="374979"/>
+              <a:ext cx="659482" cy="272188"/>
+            </a:xfrm>
+            <a:prstGeom prst="rect">
+              <a:avLst/>
+            </a:prstGeom>
+            <a:noFill/>
+            <a:ln>
+              <a:noFill/>
+            </a:ln>
+          </p:spPr>
+          <p:txBody>
+            <a:bodyPr spcFirstLastPara="1" wrap="square" lIns="91425" tIns="45700" rIns="91425" bIns="45700" anchor="t" anchorCtr="0">
+              <a:spAutoFit/>
+            </a:bodyPr>
+            <a:lstStyle/>
+            <a:p>
+              <a:pPr marL="0" marR="0" lvl="0" indent="0" algn="l" rtl="0">
+                <a:lnSpc>
+                  <a:spcPct val="100000"/>
+                </a:lnSpc>
+                <a:spcBef>
+                  <a:spcPts val="0"/>
+                </a:spcBef>
+                <a:spcAft>
+                  <a:spcPts val="0"/>
+                </a:spcAft>
+                <a:buClr>
+                  <a:schemeClr val="lt1"/>
+                </a:buClr>
+                <a:buSzPts val="800"/>
+                <a:buFont typeface="PT Sans"/>
+                <a:buNone/>
+              </a:pPr>
+              <a:r>
+                <a:rPr lang="ru-RU" sz="800" b="0">
+                  <a:solidFill>
+                    <a:schemeClr val="lt1"/>
+                  </a:solidFill>
+                  <a:latin typeface="PT Sans" panose="020B0503020203020204" pitchFamily="34" charset="0"/>
+                  <a:ea typeface="PT Sans"/>
+                  <a:cs typeface="PT Sans"/>
+                  <a:sym typeface="PT Sans"/>
+                </a:rPr>
+                <a:t>370</a:t>
+              </a:r>
+              <a:endParaRPr>
+                <a:latin typeface="PT Sans" panose="020B0503020203020204" pitchFamily="34" charset="0"/>
+              </a:endParaRPr>
+            </a:p>
+            <a:p>
+              <a:pPr marL="0" marR="0" lvl="0" indent="0" algn="l" rtl="0">
+                <a:lnSpc>
+                  <a:spcPct val="100000"/>
+                </a:lnSpc>
+                <a:spcBef>
+                  <a:spcPts val="0"/>
+                </a:spcBef>
+                <a:spcAft>
+                  <a:spcPts val="0"/>
+                </a:spcAft>
+                <a:buClr>
+                  <a:schemeClr val="lt1"/>
+                </a:buClr>
+                <a:buSzPts val="800"/>
+                <a:buFont typeface="PT Sans"/>
+                <a:buNone/>
+              </a:pPr>
+              <a:r>
+                <a:rPr lang="ru-RU" sz="800" b="0" u="none" strike="noStrike" cap="none">
+                  <a:solidFill>
+                    <a:schemeClr val="lt1"/>
+                  </a:solidFill>
+                  <a:latin typeface="PT Sans" panose="020B0503020203020204" pitchFamily="34" charset="0"/>
+                  <a:ea typeface="PT Sans"/>
+                  <a:cs typeface="PT Sans"/>
+                  <a:sym typeface="PT Sans"/>
+                </a:rPr>
+                <a:t>13</a:t>
+              </a:r>
+              <a:endParaRPr sz="800" b="0" u="none" strike="noStrike" cap="none">
+                <a:solidFill>
+                  <a:schemeClr val="lt1"/>
+                </a:solidFill>
+                <a:latin typeface="PT Sans" panose="020B0503020203020204" pitchFamily="34" charset="0"/>
+                <a:ea typeface="PT Sans"/>
+                <a:cs typeface="PT Sans"/>
+                <a:sym typeface="PT Sans"/>
+              </a:endParaRPr>
+            </a:p>
+          </p:txBody>
+        </p:sp>
+        <p:sp>
+          <p:nvSpPr>
+            <p:cNvPr id="17" name="Google Shape;139;p5">
+              <a:extLst>
+                <a:ext uri="{FF2B5EF4-FFF2-40B4-BE49-F238E27FC236}">
+                  <a16:creationId xmlns:a16="http://schemas.microsoft.com/office/drawing/2014/main" id="{A28DBFF6-9F47-6244-B20A-895959377BC2}"/>
+                </a:ext>
+              </a:extLst>
+            </p:cNvPr>
+            <p:cNvSpPr txBox="1"/>
+            <p:nvPr/>
+          </p:nvSpPr>
+          <p:spPr>
+            <a:xfrm>
+              <a:off x="8279432" y="71442"/>
+              <a:ext cx="659482" cy="272188"/>
+            </a:xfrm>
+            <a:prstGeom prst="rect">
+              <a:avLst/>
+            </a:prstGeom>
+            <a:noFill/>
+            <a:ln>
+              <a:noFill/>
+            </a:ln>
+          </p:spPr>
+          <p:txBody>
+            <a:bodyPr spcFirstLastPara="1" wrap="square" lIns="91425" tIns="45700" rIns="91425" bIns="45700" anchor="t" anchorCtr="0">
+              <a:spAutoFit/>
+            </a:bodyPr>
+            <a:lstStyle/>
+            <a:p>
+              <a:pPr marL="0" marR="0" lvl="0" indent="0" algn="l" rtl="0">
+                <a:lnSpc>
+                  <a:spcPct val="100000"/>
+                </a:lnSpc>
+                <a:spcBef>
+                  <a:spcPts val="0"/>
+                </a:spcBef>
+                <a:spcAft>
+                  <a:spcPts val="0"/>
+                </a:spcAft>
+                <a:buClr>
+                  <a:schemeClr val="lt1"/>
+                </a:buClr>
+                <a:buSzPts val="800"/>
+                <a:buFont typeface="PT Sans"/>
+                <a:buNone/>
+              </a:pPr>
+              <a:r>
+                <a:rPr lang="ru-RU" sz="800" b="0">
+                  <a:solidFill>
+                    <a:schemeClr val="lt1"/>
+                  </a:solidFill>
+                  <a:latin typeface="PT Sans" panose="020B0503020203020204" pitchFamily="34" charset="0"/>
+                  <a:ea typeface="PT Sans"/>
+                  <a:cs typeface="PT Sans"/>
+                  <a:sym typeface="PT Sans"/>
+                </a:rPr>
+                <a:t>601-800</a:t>
+              </a:r>
+              <a:endParaRPr>
+                <a:latin typeface="PT Sans" panose="020B0503020203020204" pitchFamily="34" charset="0"/>
+              </a:endParaRPr>
+            </a:p>
+            <a:p>
+              <a:pPr marL="0" marR="0" lvl="0" indent="0" algn="l" rtl="0">
+                <a:lnSpc>
+                  <a:spcPct val="100000"/>
+                </a:lnSpc>
+                <a:spcBef>
+                  <a:spcPts val="0"/>
+                </a:spcBef>
+                <a:spcAft>
+                  <a:spcPts val="0"/>
+                </a:spcAft>
+                <a:buClr>
+                  <a:schemeClr val="lt1"/>
+                </a:buClr>
+                <a:buSzPts val="800"/>
+                <a:buFont typeface="PT Sans"/>
+                <a:buNone/>
+              </a:pPr>
+              <a:r>
+                <a:rPr lang="ru-RU" sz="800" b="0" u="none" strike="noStrike" cap="none">
+                  <a:solidFill>
+                    <a:schemeClr val="lt1"/>
+                  </a:solidFill>
+                  <a:latin typeface="PT Sans" panose="020B0503020203020204" pitchFamily="34" charset="0"/>
+                  <a:ea typeface="PT Sans"/>
+                  <a:cs typeface="PT Sans"/>
+                  <a:sym typeface="PT Sans"/>
+                </a:rPr>
+                <a:t>9</a:t>
+              </a:r>
+              <a:endParaRPr sz="800" b="0" u="none" strike="noStrike" cap="none">
+                <a:solidFill>
+                  <a:schemeClr val="lt1"/>
+                </a:solidFill>
+                <a:latin typeface="PT Sans" panose="020B0503020203020204" pitchFamily="34" charset="0"/>
+                <a:ea typeface="PT Sans"/>
+                <a:cs typeface="PT Sans"/>
+                <a:sym typeface="PT Sans"/>
+              </a:endParaRPr>
+            </a:p>
+          </p:txBody>
+        </p:sp>
+      </p:grpSp>
+      <p:sp>
+        <p:nvSpPr>
+          <p:cNvPr id="19" name="Объект 2">
+            <a:extLst>
+              <a:ext uri="{FF2B5EF4-FFF2-40B4-BE49-F238E27FC236}">
+                <a16:creationId xmlns:a16="http://schemas.microsoft.com/office/drawing/2014/main" id="{30C61546-9215-4D0C-81CB-5EE3A5637E25}"/>
+              </a:ext>
+            </a:extLst>
+          </p:cNvPr>
+          <p:cNvSpPr>
+            <a:spLocks noGrp="1"/>
+          </p:cNvSpPr>
+          <p:nvPr>
+            <p:ph idx="1"/>
+          </p:nvPr>
+        </p:nvSpPr>
+        <p:spPr>
+          <a:xfrm>
+            <a:off x="183023" y="1223234"/>
+            <a:ext cx="11423283" cy="5677647"/>
+          </a:xfrm>
+        </p:spPr>
+        <p:txBody>
+          <a:bodyPr>
+            <a:normAutofit fontScale="85000" lnSpcReduction="20000"/>
+          </a:bodyPr>
+          <a:lstStyle/>
+          <a:p>
+            <a:pPr algn="l">
+              <a:buFont typeface="Arial" panose="020B0604020202020204" pitchFamily="34" charset="0"/>
+              <a:buChar char="•"/>
+            </a:pPr>
+            <a:r>
+              <a:rPr lang="ru-RU" i="0" dirty="0">
+                <a:effectLst/>
+              </a:rPr>
+              <a:t>Зачем нужен перебор </a:t>
+            </a:r>
+            <a:r>
+              <a:rPr lang="ru-RU" i="0" dirty="0" err="1">
+                <a:effectLst/>
+              </a:rPr>
+              <a:t>гиперпараметров</a:t>
+            </a:r>
+            <a:endParaRPr lang="ru-RU" i="0" dirty="0">
+              <a:effectLst/>
+            </a:endParaRPr>
+          </a:p>
+          <a:p>
+            <a:pPr marL="742950" lvl="1" indent="-285750" algn="l">
+              <a:buFont typeface="Arial" panose="020B0604020202020204" pitchFamily="34" charset="0"/>
+              <a:buChar char="•"/>
+            </a:pPr>
+            <a:r>
+              <a:rPr lang="ru-RU" i="0" dirty="0">
+                <a:effectLst/>
+              </a:rPr>
+              <a:t>Улучшение качества модели без изменения структуры алгоритма.</a:t>
+            </a:r>
+          </a:p>
+          <a:p>
+            <a:pPr marL="742950" lvl="1" indent="-285750" algn="l">
+              <a:buFont typeface="Arial" panose="020B0604020202020204" pitchFamily="34" charset="0"/>
+              <a:buChar char="•"/>
+            </a:pPr>
+            <a:r>
+              <a:rPr lang="ru-RU" i="0" dirty="0">
+                <a:effectLst/>
+              </a:rPr>
+              <a:t>Поиск баланса «качество ↔ сложность модели ↔ время обучения».</a:t>
+            </a:r>
+          </a:p>
+          <a:p>
+            <a:pPr algn="l">
+              <a:buFont typeface="Arial" panose="020B0604020202020204" pitchFamily="34" charset="0"/>
+              <a:buChar char="•"/>
+            </a:pPr>
+            <a:r>
+              <a:rPr lang="ru-RU" i="0" dirty="0">
+                <a:effectLst/>
+              </a:rPr>
+              <a:t>Когда подходит Grid Search</a:t>
+            </a:r>
+          </a:p>
+          <a:p>
+            <a:pPr marL="742950" lvl="1" indent="-285750" algn="l">
+              <a:buFont typeface="Arial" panose="020B0604020202020204" pitchFamily="34" charset="0"/>
+              <a:buChar char="•"/>
+            </a:pPr>
+            <a:r>
+              <a:rPr lang="ru-RU" i="0" dirty="0">
+                <a:effectLst/>
+              </a:rPr>
+              <a:t>Небольшое число </a:t>
+            </a:r>
+            <a:r>
+              <a:rPr lang="ru-RU" i="0" dirty="0" err="1">
+                <a:effectLst/>
+              </a:rPr>
+              <a:t>гиперпараметров</a:t>
+            </a:r>
+            <a:r>
+              <a:rPr lang="ru-RU" i="0" dirty="0">
+                <a:effectLst/>
+              </a:rPr>
+              <a:t> и значений (например, </a:t>
+            </a:r>
+            <a:r>
+              <a:rPr lang="ru-RU" i="0" dirty="0" err="1">
+                <a:effectLst/>
+              </a:rPr>
+              <a:t>mtry</a:t>
+            </a:r>
+            <a:r>
+              <a:rPr lang="ru-RU" i="0" dirty="0">
+                <a:effectLst/>
+              </a:rPr>
+              <a:t> ∈ {2,4,6}).</a:t>
+            </a:r>
+          </a:p>
+          <a:p>
+            <a:pPr marL="742950" lvl="1" indent="-285750" algn="l">
+              <a:buFont typeface="Arial" panose="020B0604020202020204" pitchFamily="34" charset="0"/>
+              <a:buChar char="•"/>
+            </a:pPr>
+            <a:r>
+              <a:rPr lang="ru-RU" i="0" dirty="0">
+                <a:effectLst/>
+              </a:rPr>
+              <a:t>Нужно тщательно исследовать </a:t>
+            </a:r>
+            <a:r>
+              <a:rPr lang="ru-RU" i="1" dirty="0">
+                <a:effectLst/>
+              </a:rPr>
+              <a:t>узкий</a:t>
+            </a:r>
+            <a:r>
+              <a:rPr lang="ru-RU" i="0" dirty="0">
+                <a:effectLst/>
+              </a:rPr>
+              <a:t> диапазон параметров вокруг «разумных» значений.</a:t>
+            </a:r>
+          </a:p>
+          <a:p>
+            <a:pPr marL="742950" lvl="1" indent="-285750" algn="l">
+              <a:buFont typeface="Arial" panose="020B0604020202020204" pitchFamily="34" charset="0"/>
+              <a:buChar char="•"/>
+            </a:pPr>
+            <a:r>
+              <a:rPr lang="ru-RU" i="0" dirty="0">
+                <a:effectLst/>
+              </a:rPr>
+              <a:t>Подходит для учебных задач и моделей средней сложности.</a:t>
+            </a:r>
+          </a:p>
+          <a:p>
+            <a:pPr algn="l">
+              <a:buFont typeface="Arial" panose="020B0604020202020204" pitchFamily="34" charset="0"/>
+              <a:buChar char="•"/>
+            </a:pPr>
+            <a:r>
+              <a:rPr lang="ru-RU" i="0" dirty="0">
+                <a:effectLst/>
+              </a:rPr>
+              <a:t>Когда лучше </a:t>
+            </a:r>
+            <a:r>
+              <a:rPr lang="ru-RU" i="0" dirty="0" err="1">
+                <a:effectLst/>
+              </a:rPr>
+              <a:t>Random</a:t>
+            </a:r>
+            <a:r>
+              <a:rPr lang="ru-RU" i="0" dirty="0">
+                <a:effectLst/>
+              </a:rPr>
+              <a:t> Search</a:t>
+            </a:r>
+          </a:p>
+          <a:p>
+            <a:pPr marL="742950" lvl="1" indent="-285750" algn="l">
+              <a:buFont typeface="Arial" panose="020B0604020202020204" pitchFamily="34" charset="0"/>
+              <a:buChar char="•"/>
+            </a:pPr>
+            <a:r>
+              <a:rPr lang="ru-RU" i="0" dirty="0">
+                <a:effectLst/>
+              </a:rPr>
+              <a:t>Много </a:t>
+            </a:r>
+            <a:r>
+              <a:rPr lang="ru-RU" i="0" dirty="0" err="1">
+                <a:effectLst/>
+              </a:rPr>
+              <a:t>гиперпараметров</a:t>
+            </a:r>
+            <a:r>
+              <a:rPr lang="ru-RU" i="0" dirty="0">
+                <a:effectLst/>
+              </a:rPr>
+              <a:t> или широкий диапазон значений.</a:t>
+            </a:r>
+          </a:p>
+          <a:p>
+            <a:pPr marL="742950" lvl="1" indent="-285750" algn="l">
+              <a:buFont typeface="Arial" panose="020B0604020202020204" pitchFamily="34" charset="0"/>
+              <a:buChar char="•"/>
+            </a:pPr>
+            <a:r>
+              <a:rPr lang="ru-RU" i="0" dirty="0">
+                <a:effectLst/>
+              </a:rPr>
+              <a:t>Важна скорость: за то же время можно использовать больше комбинаций.</a:t>
+            </a:r>
+          </a:p>
+          <a:p>
+            <a:pPr marL="742950" lvl="1" indent="-285750" algn="l">
+              <a:buFont typeface="Arial" panose="020B0604020202020204" pitchFamily="34" charset="0"/>
+              <a:buChar char="•"/>
+            </a:pPr>
+            <a:r>
+              <a:rPr lang="ru-RU" i="0" dirty="0">
+                <a:effectLst/>
+              </a:rPr>
+              <a:t>Практически в больших проектах часто начинают с </a:t>
+            </a:r>
+            <a:r>
+              <a:rPr lang="ru-RU" i="0" dirty="0" err="1">
+                <a:effectLst/>
+              </a:rPr>
+              <a:t>Random</a:t>
+            </a:r>
+            <a:r>
+              <a:rPr lang="ru-RU" i="0" dirty="0">
+                <a:effectLst/>
+              </a:rPr>
+              <a:t> Search, а затем локально </a:t>
+            </a:r>
+            <a:r>
+              <a:rPr lang="ru-RU" i="0" dirty="0" err="1">
+                <a:effectLst/>
+              </a:rPr>
+              <a:t>донастраивают</a:t>
+            </a:r>
+            <a:r>
+              <a:rPr lang="ru-RU" i="0" dirty="0">
+                <a:effectLst/>
+              </a:rPr>
+              <a:t>.</a:t>
+            </a:r>
+          </a:p>
+          <a:p>
+            <a:pPr algn="l">
+              <a:buFont typeface="Arial" panose="020B0604020202020204" pitchFamily="34" charset="0"/>
+              <a:buChar char="•"/>
+            </a:pPr>
+            <a:r>
+              <a:rPr lang="ru-RU" i="0" dirty="0">
+                <a:effectLst/>
+              </a:rPr>
+              <a:t>Общие рекомендации</a:t>
+            </a:r>
+          </a:p>
+          <a:p>
+            <a:pPr marL="742950" lvl="1" indent="-285750" algn="l">
+              <a:buFont typeface="Arial" panose="020B0604020202020204" pitchFamily="34" charset="0"/>
+              <a:buChar char="•"/>
+            </a:pPr>
+            <a:r>
+              <a:rPr lang="ru-RU" i="0" dirty="0">
+                <a:effectLst/>
+              </a:rPr>
+              <a:t>Всегда отделяйте </a:t>
+            </a:r>
+            <a:r>
+              <a:rPr lang="ru-RU" i="0" dirty="0" err="1">
+                <a:effectLst/>
+              </a:rPr>
+              <a:t>train</a:t>
+            </a:r>
+            <a:r>
+              <a:rPr lang="ru-RU" i="0" dirty="0">
+                <a:effectLst/>
+              </a:rPr>
+              <a:t>/</a:t>
+            </a:r>
+            <a:r>
+              <a:rPr lang="ru-RU" i="0" dirty="0" err="1">
+                <a:effectLst/>
+              </a:rPr>
+              <a:t>validation</a:t>
+            </a:r>
+            <a:r>
+              <a:rPr lang="ru-RU" i="0" dirty="0">
+                <a:effectLst/>
+              </a:rPr>
+              <a:t> (CV) от </a:t>
+            </a:r>
+            <a:r>
+              <a:rPr lang="ru-RU" i="0" dirty="0" err="1">
+                <a:effectLst/>
+              </a:rPr>
+              <a:t>final</a:t>
+            </a:r>
+            <a:r>
+              <a:rPr lang="ru-RU" i="0" dirty="0">
+                <a:effectLst/>
+              </a:rPr>
+              <a:t> </a:t>
+            </a:r>
+            <a:r>
+              <a:rPr lang="ru-RU" i="0" dirty="0" err="1">
+                <a:effectLst/>
+              </a:rPr>
+              <a:t>test</a:t>
+            </a:r>
+            <a:r>
+              <a:rPr lang="ru-RU" i="0" dirty="0">
+                <a:effectLst/>
+              </a:rPr>
+              <a:t>: тест не должен участвовать в подборе </a:t>
+            </a:r>
+            <a:r>
+              <a:rPr lang="ru-RU" i="0" dirty="0" err="1">
+                <a:effectLst/>
+              </a:rPr>
+              <a:t>гиперпараметров</a:t>
+            </a:r>
+            <a:r>
+              <a:rPr lang="ru-RU" i="0" dirty="0">
+                <a:effectLst/>
+              </a:rPr>
+              <a:t>.</a:t>
+            </a:r>
+          </a:p>
+          <a:p>
+            <a:pPr marL="742950" lvl="1" indent="-285750" algn="l">
+              <a:buFont typeface="Arial" panose="020B0604020202020204" pitchFamily="34" charset="0"/>
+              <a:buChar char="•"/>
+            </a:pPr>
+            <a:r>
+              <a:rPr lang="ru-RU" i="0" dirty="0">
+                <a:effectLst/>
+              </a:rPr>
+              <a:t>Выбирайте метрику, отражающую задачу (для дисбаланса — F1 или AUC‑PR, а не только </a:t>
+            </a:r>
+            <a:r>
+              <a:rPr lang="ru-RU" i="0" dirty="0" err="1">
+                <a:effectLst/>
+              </a:rPr>
+              <a:t>Accuracy</a:t>
+            </a:r>
+            <a:r>
+              <a:rPr lang="ru-RU" i="0" dirty="0">
+                <a:effectLst/>
+              </a:rPr>
+              <a:t>).</a:t>
+            </a:r>
+          </a:p>
+          <a:p>
+            <a:pPr marL="742950" lvl="1" indent="-285750" algn="l">
+              <a:buFont typeface="Arial" panose="020B0604020202020204" pitchFamily="34" charset="0"/>
+              <a:buChar char="•"/>
+            </a:pPr>
+            <a:r>
+              <a:rPr lang="ru-RU" i="0" dirty="0">
+                <a:effectLst/>
+              </a:rPr>
+              <a:t>Начинайте с грубой настройки (широкий диапазон, мало итераций), затем при необходимости делайте более «тонкий» поиск в окрестности лучших значений.</a:t>
+            </a:r>
+          </a:p>
+        </p:txBody>
+      </p:sp>
+    </p:spTree>
+    <p:extLst>
+      <p:ext uri="{BB962C8B-B14F-4D97-AF65-F5344CB8AC3E}">
+        <p14:creationId xmlns:p14="http://schemas.microsoft.com/office/powerpoint/2010/main" val="3082961005"/>
+      </p:ext>
+    </p:extLst>
+  </p:cSld>
+  <p:clrMapOvr>
+    <a:masterClrMapping/>
+  </p:clrMapOvr>
+</p:sld>
+</file>
+
+<file path=ppt/slides/slide24.xml><?xml version="1.0" encoding="utf-8"?>
 <p:sld xmlns:a="http://schemas.openxmlformats.org/drawingml/2006/main" xmlns:r="http://schemas.openxmlformats.org/officeDocument/2006/relationships" xmlns:p="http://schemas.openxmlformats.org/presentationml/2006/main">
   <p:cSld>
     <p:spTree>
@@ -19619,8 +22763,8 @@
           </p:txBody>
         </p:sp>
       </p:grpSp>
-      <mc:AlternateContent xmlns:mc="http://schemas.openxmlformats.org/markup-compatibility/2006">
-        <mc:Choice xmlns:a14="http://schemas.microsoft.com/office/drawing/2010/main" Requires="a14">
+      <mc:AlternateContent xmlns:mc="http://schemas.openxmlformats.org/markup-compatibility/2006" xmlns:a14="http://schemas.microsoft.com/office/drawing/2010/main">
+        <mc:Choice Requires="a14">
           <p:sp>
             <p:nvSpPr>
               <p:cNvPr id="19" name="Объект 2">
@@ -19828,7 +22972,7 @@
             </p:txBody>
           </p:sp>
         </mc:Choice>
-        <mc:Fallback>
+        <mc:Fallback xmlns="">
           <p:sp>
             <p:nvSpPr>
               <p:cNvPr id="19" name="Объект 2">
